--- a/assets/figures-editable/c3-c4/c3-e08.pptx
+++ b/assets/figures-editable/c3-c4/c3-e08.pptx
@@ -3104,8 +3104,8 @@
         </p:nvSpPr>
         <p:spPr>
           <a:xfrm>
-            <a:off x="274320" y="137160"/>
-            <a:ext cx="11612880" cy="365760"/>
+            <a:off x="274320" y="118872"/>
+            <a:ext cx="11612880" cy="340105"/>
           </a:xfrm>
           <a:prstGeom prst="rect">
             <a:avLst/>
@@ -3114,7 +3114,7 @@
           <a:effectLst/>
         </p:spPr>
         <p:txBody>
-          <a:bodyPr wrap="square" lIns="27432" rIns="27432" tIns="18288" bIns="18288" anchor="ctr">
+          <a:bodyPr wrap="none" lIns="18288" rIns="18288" tIns="18288" bIns="18288" anchor="t">
             <a:spAutoFit/>
           </a:bodyPr>
           <a:lstStyle/>
@@ -3125,7 +3125,7 @@
               </a:spcAft>
             </a:pPr>
             <a:r>
-              <a:rPr sz="2100" b="0" i="0">
+              <a:rPr sz="1900" b="1" i="0">
                 <a:solidFill>
                   <a:srgbClr val="8EDBD4"/>
                 </a:solidFill>
@@ -3136,23 +3136,20 @@
           </a:p>
         </p:txBody>
       </p:sp>
-      <p:sp>
-        <p:nvSpPr>
-          <p:cNvPr id="3" name="C3-E08 ellipse 1" descr="sci-ppt:o001"/>
-          <p:cNvSpPr/>
+      <p:cxnSp>
+        <p:nvCxnSpPr>
+          <p:cNvPr id="3" name="C3-E08 line 1" descr="sci-ppt:o001"/>
+          <p:cNvCxnSpPr/>
           <p:nvPr/>
-        </p:nvSpPr>
-        <p:spPr>
-          <a:xfrm>
-            <a:off x="1417319" y="1280160"/>
-            <a:ext cx="1554480" cy="1554480"/>
-          </a:xfrm>
-          <a:prstGeom prst="ellipse">
+        </p:nvCxnSpPr>
+        <p:spPr>
+          <a:xfrm>
+            <a:off x="6949440" y="4937760"/>
+            <a:ext cx="4846319" cy="0"/>
+          </a:xfrm>
+          <a:prstGeom prst="line">
             <a:avLst/>
           </a:prstGeom>
-          <a:solidFill>
-            <a:srgbClr val="213E4B"/>
-          </a:solidFill>
           <a:ln w="19050">
             <a:solidFill>
               <a:srgbClr val="B4C7D2"/>
@@ -3160,31 +3157,21 @@
           </a:ln>
           <a:effectLst/>
         </p:spPr>
-        <p:txBody>
-          <a:bodyPr rtlCol="0" anchor="ctr"/>
-          <a:lstStyle/>
-          <a:p>
-            <a:pPr algn="ctr"/>
-          </a:p>
-        </p:txBody>
-      </p:sp>
-      <p:sp>
-        <p:nvSpPr>
-          <p:cNvPr id="4" name="C3-E08 ellipse 2" descr="sci-ppt:o002"/>
-          <p:cNvSpPr/>
+      </p:cxnSp>
+      <p:cxnSp>
+        <p:nvCxnSpPr>
+          <p:cNvPr id="4" name="C3-E08 line 2" descr="sci-ppt:o002"/>
+          <p:cNvCxnSpPr/>
           <p:nvPr/>
-        </p:nvSpPr>
-        <p:spPr>
-          <a:xfrm>
-            <a:off x="7909560" y="1280160"/>
-            <a:ext cx="1554480" cy="1554480"/>
-          </a:xfrm>
-          <a:prstGeom prst="ellipse">
+        </p:nvCxnSpPr>
+        <p:spPr>
+          <a:xfrm>
+            <a:off x="6949440" y="1371600"/>
+            <a:ext cx="0" cy="3566160"/>
+          </a:xfrm>
+          <a:prstGeom prst="line">
             <a:avLst/>
           </a:prstGeom>
-          <a:solidFill>
-            <a:srgbClr val="213E4B"/>
-          </a:solidFill>
           <a:ln w="19050">
             <a:solidFill>
               <a:srgbClr val="B4C7D2"/>
@@ -3192,24 +3179,61 @@
           </a:ln>
           <a:effectLst/>
         </p:spPr>
-        <p:txBody>
-          <a:bodyPr rtlCol="0" anchor="ctr"/>
-          <a:lstStyle/>
-          <a:p>
-            <a:pPr algn="ctr"/>
-          </a:p>
-        </p:txBody>
-      </p:sp>
-      <p:sp>
-        <p:nvSpPr>
-          <p:cNvPr id="5" name="C3-E08 text 3" descr="sci-ppt:o003"/>
+      </p:cxnSp>
+      <p:cxnSp>
+        <p:nvCxnSpPr>
+          <p:cNvPr id="5" name="C3-E08 line 3" descr="sci-ppt:o003"/>
+          <p:cNvCxnSpPr/>
+          <p:nvPr/>
+        </p:nvCxnSpPr>
+        <p:spPr>
+          <a:xfrm>
+            <a:off x="6949440" y="4937760"/>
+            <a:ext cx="0" cy="64008"/>
+          </a:xfrm>
+          <a:prstGeom prst="line">
+            <a:avLst/>
+          </a:prstGeom>
+          <a:ln w="12700">
+            <a:solidFill>
+              <a:srgbClr val="B4C7D2"/>
+            </a:solidFill>
+          </a:ln>
+          <a:effectLst/>
+        </p:spPr>
+      </p:cxnSp>
+      <p:cxnSp>
+        <p:nvCxnSpPr>
+          <p:cNvPr id="6" name="C3-E08 line 4" descr="sci-ppt:o004"/>
+          <p:cNvCxnSpPr/>
+          <p:nvPr/>
+        </p:nvCxnSpPr>
+        <p:spPr>
+          <a:xfrm>
+            <a:off x="6949440" y="1371600"/>
+            <a:ext cx="0" cy="3566160"/>
+          </a:xfrm>
+          <a:prstGeom prst="line">
+            <a:avLst/>
+          </a:prstGeom>
+          <a:ln w="7620">
+            <a:solidFill>
+              <a:srgbClr val="2E4756"/>
+            </a:solidFill>
+          </a:ln>
+          <a:effectLst/>
+        </p:spPr>
+      </p:cxnSp>
+      <p:sp>
+        <p:nvSpPr>
+          <p:cNvPr id="7" name="C3-E08 text 5" descr="sci-ppt:o005"/>
           <p:cNvSpPr txBox="1"/>
           <p:nvPr/>
         </p:nvSpPr>
         <p:spPr>
           <a:xfrm>
-            <a:off x="1645920" y="1874519"/>
-            <a:ext cx="1463040" cy="365760"/>
+            <a:off x="6492240" y="5020056"/>
+            <a:ext cx="914400" cy="208407"/>
           </a:xfrm>
           <a:prstGeom prst="rect">
             <a:avLst/>
@@ -3218,7 +3242,781 @@
           <a:effectLst/>
         </p:spPr>
         <p:txBody>
-          <a:bodyPr wrap="square" lIns="27432" rIns="27432" tIns="18288" bIns="18288" anchor="ctr">
+          <a:bodyPr wrap="none" lIns="18288" rIns="18288" tIns="18288" bIns="18288" anchor="t">
+            <a:spAutoFit/>
+          </a:bodyPr>
+          <a:lstStyle/>
+          <a:p>
+            <a:pPr algn="ctr">
+              <a:spcAft>
+                <a:spcPts val="0"/>
+              </a:spcAft>
+            </a:pPr>
+            <a:r>
+              <a:rPr sz="1050" b="0" i="0">
+                <a:solidFill>
+                  <a:srgbClr val="B4C7D2"/>
+                </a:solidFill>
+                <a:latin typeface="Arial"/>
+              </a:rPr>
+              <a:t>0.2</a:t>
+            </a:r>
+          </a:p>
+        </p:txBody>
+      </p:sp>
+      <p:cxnSp>
+        <p:nvCxnSpPr>
+          <p:cNvPr id="8" name="C3-E08 line 6" descr="sci-ppt:o006"/>
+          <p:cNvCxnSpPr/>
+          <p:nvPr/>
+        </p:nvCxnSpPr>
+        <p:spPr>
+          <a:xfrm>
+            <a:off x="8161019" y="4937760"/>
+            <a:ext cx="0" cy="64008"/>
+          </a:xfrm>
+          <a:prstGeom prst="line">
+            <a:avLst/>
+          </a:prstGeom>
+          <a:ln w="12700">
+            <a:solidFill>
+              <a:srgbClr val="B4C7D2"/>
+            </a:solidFill>
+          </a:ln>
+          <a:effectLst/>
+        </p:spPr>
+      </p:cxnSp>
+      <p:cxnSp>
+        <p:nvCxnSpPr>
+          <p:cNvPr id="9" name="C3-E08 line 7" descr="sci-ppt:o007"/>
+          <p:cNvCxnSpPr/>
+          <p:nvPr/>
+        </p:nvCxnSpPr>
+        <p:spPr>
+          <a:xfrm>
+            <a:off x="8161019" y="1371600"/>
+            <a:ext cx="0" cy="3566160"/>
+          </a:xfrm>
+          <a:prstGeom prst="line">
+            <a:avLst/>
+          </a:prstGeom>
+          <a:ln w="7620">
+            <a:solidFill>
+              <a:srgbClr val="2E4756"/>
+            </a:solidFill>
+          </a:ln>
+          <a:effectLst/>
+        </p:spPr>
+      </p:cxnSp>
+      <p:sp>
+        <p:nvSpPr>
+          <p:cNvPr id="10" name="C3-E08 text 8" descr="sci-ppt:o008"/>
+          <p:cNvSpPr txBox="1"/>
+          <p:nvPr/>
+        </p:nvSpPr>
+        <p:spPr>
+          <a:xfrm>
+            <a:off x="7703819" y="5020056"/>
+            <a:ext cx="914400" cy="208407"/>
+          </a:xfrm>
+          <a:prstGeom prst="rect">
+            <a:avLst/>
+          </a:prstGeom>
+          <a:noFill/>
+          <a:effectLst/>
+        </p:spPr>
+        <p:txBody>
+          <a:bodyPr wrap="none" lIns="18288" rIns="18288" tIns="18288" bIns="18288" anchor="t">
+            <a:spAutoFit/>
+          </a:bodyPr>
+          <a:lstStyle/>
+          <a:p>
+            <a:pPr algn="ctr">
+              <a:spcAft>
+                <a:spcPts val="0"/>
+              </a:spcAft>
+            </a:pPr>
+            <a:r>
+              <a:rPr sz="1050" b="0" i="0">
+                <a:solidFill>
+                  <a:srgbClr val="B4C7D2"/>
+                </a:solidFill>
+                <a:latin typeface="Arial"/>
+              </a:rPr>
+              <a:t>0.4</a:t>
+            </a:r>
+          </a:p>
+        </p:txBody>
+      </p:sp>
+      <p:cxnSp>
+        <p:nvCxnSpPr>
+          <p:cNvPr id="11" name="C3-E08 line 9" descr="sci-ppt:o009"/>
+          <p:cNvCxnSpPr/>
+          <p:nvPr/>
+        </p:nvCxnSpPr>
+        <p:spPr>
+          <a:xfrm>
+            <a:off x="9372600" y="4937760"/>
+            <a:ext cx="0" cy="64008"/>
+          </a:xfrm>
+          <a:prstGeom prst="line">
+            <a:avLst/>
+          </a:prstGeom>
+          <a:ln w="12700">
+            <a:solidFill>
+              <a:srgbClr val="B4C7D2"/>
+            </a:solidFill>
+          </a:ln>
+          <a:effectLst/>
+        </p:spPr>
+      </p:cxnSp>
+      <p:cxnSp>
+        <p:nvCxnSpPr>
+          <p:cNvPr id="12" name="C3-E08 line 10" descr="sci-ppt:o010"/>
+          <p:cNvCxnSpPr/>
+          <p:nvPr/>
+        </p:nvCxnSpPr>
+        <p:spPr>
+          <a:xfrm>
+            <a:off x="9372600" y="1371600"/>
+            <a:ext cx="0" cy="3566160"/>
+          </a:xfrm>
+          <a:prstGeom prst="line">
+            <a:avLst/>
+          </a:prstGeom>
+          <a:ln w="7620">
+            <a:solidFill>
+              <a:srgbClr val="2E4756"/>
+            </a:solidFill>
+          </a:ln>
+          <a:effectLst/>
+        </p:spPr>
+      </p:cxnSp>
+      <p:sp>
+        <p:nvSpPr>
+          <p:cNvPr id="13" name="C3-E08 text 11" descr="sci-ppt:o011"/>
+          <p:cNvSpPr txBox="1"/>
+          <p:nvPr/>
+        </p:nvSpPr>
+        <p:spPr>
+          <a:xfrm>
+            <a:off x="8915400" y="5020056"/>
+            <a:ext cx="914400" cy="208407"/>
+          </a:xfrm>
+          <a:prstGeom prst="rect">
+            <a:avLst/>
+          </a:prstGeom>
+          <a:noFill/>
+          <a:effectLst/>
+        </p:spPr>
+        <p:txBody>
+          <a:bodyPr wrap="none" lIns="18288" rIns="18288" tIns="18288" bIns="18288" anchor="t">
+            <a:spAutoFit/>
+          </a:bodyPr>
+          <a:lstStyle/>
+          <a:p>
+            <a:pPr algn="ctr">
+              <a:spcAft>
+                <a:spcPts val="0"/>
+              </a:spcAft>
+            </a:pPr>
+            <a:r>
+              <a:rPr sz="1050" b="0" i="0">
+                <a:solidFill>
+                  <a:srgbClr val="B4C7D2"/>
+                </a:solidFill>
+                <a:latin typeface="Arial"/>
+              </a:rPr>
+              <a:t>0.6</a:t>
+            </a:r>
+          </a:p>
+        </p:txBody>
+      </p:sp>
+      <p:cxnSp>
+        <p:nvCxnSpPr>
+          <p:cNvPr id="14" name="C3-E08 line 12" descr="sci-ppt:o012"/>
+          <p:cNvCxnSpPr/>
+          <p:nvPr/>
+        </p:nvCxnSpPr>
+        <p:spPr>
+          <a:xfrm>
+            <a:off x="10584180" y="4937760"/>
+            <a:ext cx="0" cy="64008"/>
+          </a:xfrm>
+          <a:prstGeom prst="line">
+            <a:avLst/>
+          </a:prstGeom>
+          <a:ln w="12700">
+            <a:solidFill>
+              <a:srgbClr val="B4C7D2"/>
+            </a:solidFill>
+          </a:ln>
+          <a:effectLst/>
+        </p:spPr>
+      </p:cxnSp>
+      <p:cxnSp>
+        <p:nvCxnSpPr>
+          <p:cNvPr id="15" name="C3-E08 line 13" descr="sci-ppt:o013"/>
+          <p:cNvCxnSpPr/>
+          <p:nvPr/>
+        </p:nvCxnSpPr>
+        <p:spPr>
+          <a:xfrm>
+            <a:off x="10584180" y="1371600"/>
+            <a:ext cx="0" cy="3566160"/>
+          </a:xfrm>
+          <a:prstGeom prst="line">
+            <a:avLst/>
+          </a:prstGeom>
+          <a:ln w="7620">
+            <a:solidFill>
+              <a:srgbClr val="2E4756"/>
+            </a:solidFill>
+          </a:ln>
+          <a:effectLst/>
+        </p:spPr>
+      </p:cxnSp>
+      <p:sp>
+        <p:nvSpPr>
+          <p:cNvPr id="16" name="C3-E08 text 14" descr="sci-ppt:o014"/>
+          <p:cNvSpPr txBox="1"/>
+          <p:nvPr/>
+        </p:nvSpPr>
+        <p:spPr>
+          <a:xfrm>
+            <a:off x="10126980" y="5020056"/>
+            <a:ext cx="914400" cy="208407"/>
+          </a:xfrm>
+          <a:prstGeom prst="rect">
+            <a:avLst/>
+          </a:prstGeom>
+          <a:noFill/>
+          <a:effectLst/>
+        </p:spPr>
+        <p:txBody>
+          <a:bodyPr wrap="none" lIns="18288" rIns="18288" tIns="18288" bIns="18288" anchor="t">
+            <a:spAutoFit/>
+          </a:bodyPr>
+          <a:lstStyle/>
+          <a:p>
+            <a:pPr algn="ctr">
+              <a:spcAft>
+                <a:spcPts val="0"/>
+              </a:spcAft>
+            </a:pPr>
+            <a:r>
+              <a:rPr sz="1050" b="0" i="0">
+                <a:solidFill>
+                  <a:srgbClr val="B4C7D2"/>
+                </a:solidFill>
+                <a:latin typeface="Arial"/>
+              </a:rPr>
+              <a:t>0.8</a:t>
+            </a:r>
+          </a:p>
+        </p:txBody>
+      </p:sp>
+      <p:cxnSp>
+        <p:nvCxnSpPr>
+          <p:cNvPr id="17" name="C3-E08 line 15" descr="sci-ppt:o015"/>
+          <p:cNvCxnSpPr/>
+          <p:nvPr/>
+        </p:nvCxnSpPr>
+        <p:spPr>
+          <a:xfrm>
+            <a:off x="11795759" y="4937760"/>
+            <a:ext cx="0" cy="64008"/>
+          </a:xfrm>
+          <a:prstGeom prst="line">
+            <a:avLst/>
+          </a:prstGeom>
+          <a:ln w="12700">
+            <a:solidFill>
+              <a:srgbClr val="B4C7D2"/>
+            </a:solidFill>
+          </a:ln>
+          <a:effectLst/>
+        </p:spPr>
+      </p:cxnSp>
+      <p:cxnSp>
+        <p:nvCxnSpPr>
+          <p:cNvPr id="18" name="C3-E08 line 16" descr="sci-ppt:o016"/>
+          <p:cNvCxnSpPr/>
+          <p:nvPr/>
+        </p:nvCxnSpPr>
+        <p:spPr>
+          <a:xfrm>
+            <a:off x="11795759" y="1371600"/>
+            <a:ext cx="0" cy="3566160"/>
+          </a:xfrm>
+          <a:prstGeom prst="line">
+            <a:avLst/>
+          </a:prstGeom>
+          <a:ln w="7620">
+            <a:solidFill>
+              <a:srgbClr val="2E4756"/>
+            </a:solidFill>
+          </a:ln>
+          <a:effectLst/>
+        </p:spPr>
+      </p:cxnSp>
+      <p:sp>
+        <p:nvSpPr>
+          <p:cNvPr id="19" name="C3-E08 text 17" descr="sci-ppt:o017"/>
+          <p:cNvSpPr txBox="1"/>
+          <p:nvPr/>
+        </p:nvSpPr>
+        <p:spPr>
+          <a:xfrm>
+            <a:off x="11338559" y="5020056"/>
+            <a:ext cx="914400" cy="208407"/>
+          </a:xfrm>
+          <a:prstGeom prst="rect">
+            <a:avLst/>
+          </a:prstGeom>
+          <a:noFill/>
+          <a:effectLst/>
+        </p:spPr>
+        <p:txBody>
+          <a:bodyPr wrap="none" lIns="18288" rIns="18288" tIns="18288" bIns="18288" anchor="t">
+            <a:spAutoFit/>
+          </a:bodyPr>
+          <a:lstStyle/>
+          <a:p>
+            <a:pPr algn="ctr">
+              <a:spcAft>
+                <a:spcPts val="0"/>
+              </a:spcAft>
+            </a:pPr>
+            <a:r>
+              <a:rPr sz="1050" b="0" i="0">
+                <a:solidFill>
+                  <a:srgbClr val="B4C7D2"/>
+                </a:solidFill>
+                <a:latin typeface="Arial"/>
+              </a:rPr>
+              <a:t>1.0</a:t>
+            </a:r>
+          </a:p>
+        </p:txBody>
+      </p:sp>
+      <p:cxnSp>
+        <p:nvCxnSpPr>
+          <p:cNvPr id="20" name="C3-E08 line 18" descr="sci-ppt:o018"/>
+          <p:cNvCxnSpPr/>
+          <p:nvPr/>
+        </p:nvCxnSpPr>
+        <p:spPr>
+          <a:xfrm>
+            <a:off x="6885431" y="4937760"/>
+            <a:ext cx="64009" cy="0"/>
+          </a:xfrm>
+          <a:prstGeom prst="line">
+            <a:avLst/>
+          </a:prstGeom>
+          <a:ln w="12700">
+            <a:solidFill>
+              <a:srgbClr val="B4C7D2"/>
+            </a:solidFill>
+          </a:ln>
+          <a:effectLst/>
+        </p:spPr>
+      </p:cxnSp>
+      <p:cxnSp>
+        <p:nvCxnSpPr>
+          <p:cNvPr id="21" name="C3-E08 line 19" descr="sci-ppt:o019"/>
+          <p:cNvCxnSpPr/>
+          <p:nvPr/>
+        </p:nvCxnSpPr>
+        <p:spPr>
+          <a:xfrm>
+            <a:off x="6885431" y="4046220"/>
+            <a:ext cx="64009" cy="0"/>
+          </a:xfrm>
+          <a:prstGeom prst="line">
+            <a:avLst/>
+          </a:prstGeom>
+          <a:ln w="12700">
+            <a:solidFill>
+              <a:srgbClr val="B4C7D2"/>
+            </a:solidFill>
+          </a:ln>
+          <a:effectLst/>
+        </p:spPr>
+      </p:cxnSp>
+      <p:cxnSp>
+        <p:nvCxnSpPr>
+          <p:cNvPr id="22" name="C3-E08 line 20" descr="sci-ppt:o020"/>
+          <p:cNvCxnSpPr/>
+          <p:nvPr/>
+        </p:nvCxnSpPr>
+        <p:spPr>
+          <a:xfrm>
+            <a:off x="6949440" y="4046220"/>
+            <a:ext cx="4846319" cy="0"/>
+          </a:xfrm>
+          <a:prstGeom prst="line">
+            <a:avLst/>
+          </a:prstGeom>
+          <a:ln w="7620">
+            <a:solidFill>
+              <a:srgbClr val="2E4756"/>
+            </a:solidFill>
+          </a:ln>
+          <a:effectLst/>
+        </p:spPr>
+      </p:cxnSp>
+      <p:sp>
+        <p:nvSpPr>
+          <p:cNvPr id="23" name="C3-E08 text 21" descr="sci-ppt:o021"/>
+          <p:cNvSpPr txBox="1"/>
+          <p:nvPr/>
+        </p:nvSpPr>
+        <p:spPr>
+          <a:xfrm>
+            <a:off x="6080759" y="3963924"/>
+            <a:ext cx="777240" cy="208407"/>
+          </a:xfrm>
+          <a:prstGeom prst="rect">
+            <a:avLst/>
+          </a:prstGeom>
+          <a:noFill/>
+          <a:effectLst/>
+        </p:spPr>
+        <p:txBody>
+          <a:bodyPr wrap="none" lIns="18288" rIns="18288" tIns="18288" bIns="18288" anchor="t">
+            <a:spAutoFit/>
+          </a:bodyPr>
+          <a:lstStyle/>
+          <a:p>
+            <a:pPr algn="r">
+              <a:spcAft>
+                <a:spcPts val="0"/>
+              </a:spcAft>
+            </a:pPr>
+            <a:r>
+              <a:rPr sz="1050" b="0" i="0">
+                <a:solidFill>
+                  <a:srgbClr val="B4C7D2"/>
+                </a:solidFill>
+                <a:latin typeface="Arial"/>
+              </a:rPr>
+              <a:t>4</a:t>
+            </a:r>
+          </a:p>
+        </p:txBody>
+      </p:sp>
+      <p:cxnSp>
+        <p:nvCxnSpPr>
+          <p:cNvPr id="24" name="C3-E08 line 22" descr="sci-ppt:o022"/>
+          <p:cNvCxnSpPr/>
+          <p:nvPr/>
+        </p:nvCxnSpPr>
+        <p:spPr>
+          <a:xfrm>
+            <a:off x="6885431" y="3154680"/>
+            <a:ext cx="64009" cy="0"/>
+          </a:xfrm>
+          <a:prstGeom prst="line">
+            <a:avLst/>
+          </a:prstGeom>
+          <a:ln w="12700">
+            <a:solidFill>
+              <a:srgbClr val="B4C7D2"/>
+            </a:solidFill>
+          </a:ln>
+          <a:effectLst/>
+        </p:spPr>
+      </p:cxnSp>
+      <p:cxnSp>
+        <p:nvCxnSpPr>
+          <p:cNvPr id="25" name="C3-E08 line 23" descr="sci-ppt:o023"/>
+          <p:cNvCxnSpPr/>
+          <p:nvPr/>
+        </p:nvCxnSpPr>
+        <p:spPr>
+          <a:xfrm>
+            <a:off x="6949440" y="3154680"/>
+            <a:ext cx="4846319" cy="0"/>
+          </a:xfrm>
+          <a:prstGeom prst="line">
+            <a:avLst/>
+          </a:prstGeom>
+          <a:ln w="7620">
+            <a:solidFill>
+              <a:srgbClr val="2E4756"/>
+            </a:solidFill>
+          </a:ln>
+          <a:effectLst/>
+        </p:spPr>
+      </p:cxnSp>
+      <p:sp>
+        <p:nvSpPr>
+          <p:cNvPr id="26" name="C3-E08 text 24" descr="sci-ppt:o024"/>
+          <p:cNvSpPr txBox="1"/>
+          <p:nvPr/>
+        </p:nvSpPr>
+        <p:spPr>
+          <a:xfrm>
+            <a:off x="6080759" y="3072384"/>
+            <a:ext cx="777240" cy="208407"/>
+          </a:xfrm>
+          <a:prstGeom prst="rect">
+            <a:avLst/>
+          </a:prstGeom>
+          <a:noFill/>
+          <a:effectLst/>
+        </p:spPr>
+        <p:txBody>
+          <a:bodyPr wrap="none" lIns="18288" rIns="18288" tIns="18288" bIns="18288" anchor="t">
+            <a:spAutoFit/>
+          </a:bodyPr>
+          <a:lstStyle/>
+          <a:p>
+            <a:pPr algn="r">
+              <a:spcAft>
+                <a:spcPts val="0"/>
+              </a:spcAft>
+            </a:pPr>
+            <a:r>
+              <a:rPr sz="1050" b="0" i="0">
+                <a:solidFill>
+                  <a:srgbClr val="B4C7D2"/>
+                </a:solidFill>
+                <a:latin typeface="Arial"/>
+              </a:rPr>
+              <a:t>8</a:t>
+            </a:r>
+          </a:p>
+        </p:txBody>
+      </p:sp>
+      <p:cxnSp>
+        <p:nvCxnSpPr>
+          <p:cNvPr id="27" name="C3-E08 line 25" descr="sci-ppt:o025"/>
+          <p:cNvCxnSpPr/>
+          <p:nvPr/>
+        </p:nvCxnSpPr>
+        <p:spPr>
+          <a:xfrm>
+            <a:off x="6885431" y="2263140"/>
+            <a:ext cx="64009" cy="0"/>
+          </a:xfrm>
+          <a:prstGeom prst="line">
+            <a:avLst/>
+          </a:prstGeom>
+          <a:ln w="12700">
+            <a:solidFill>
+              <a:srgbClr val="B4C7D2"/>
+            </a:solidFill>
+          </a:ln>
+          <a:effectLst/>
+        </p:spPr>
+      </p:cxnSp>
+      <p:cxnSp>
+        <p:nvCxnSpPr>
+          <p:cNvPr id="28" name="C3-E08 line 26" descr="sci-ppt:o026"/>
+          <p:cNvCxnSpPr/>
+          <p:nvPr/>
+        </p:nvCxnSpPr>
+        <p:spPr>
+          <a:xfrm>
+            <a:off x="6949440" y="2263140"/>
+            <a:ext cx="4846319" cy="0"/>
+          </a:xfrm>
+          <a:prstGeom prst="line">
+            <a:avLst/>
+          </a:prstGeom>
+          <a:ln w="7620">
+            <a:solidFill>
+              <a:srgbClr val="2E4756"/>
+            </a:solidFill>
+          </a:ln>
+          <a:effectLst/>
+        </p:spPr>
+      </p:cxnSp>
+      <p:sp>
+        <p:nvSpPr>
+          <p:cNvPr id="29" name="C3-E08 text 27" descr="sci-ppt:o027"/>
+          <p:cNvSpPr txBox="1"/>
+          <p:nvPr/>
+        </p:nvSpPr>
+        <p:spPr>
+          <a:xfrm>
+            <a:off x="6080759" y="2180844"/>
+            <a:ext cx="777240" cy="208407"/>
+          </a:xfrm>
+          <a:prstGeom prst="rect">
+            <a:avLst/>
+          </a:prstGeom>
+          <a:noFill/>
+          <a:effectLst/>
+        </p:spPr>
+        <p:txBody>
+          <a:bodyPr wrap="none" lIns="18288" rIns="18288" tIns="18288" bIns="18288" anchor="t">
+            <a:spAutoFit/>
+          </a:bodyPr>
+          <a:lstStyle/>
+          <a:p>
+            <a:pPr algn="r">
+              <a:spcAft>
+                <a:spcPts val="0"/>
+              </a:spcAft>
+            </a:pPr>
+            <a:r>
+              <a:rPr sz="1050" b="0" i="0">
+                <a:solidFill>
+                  <a:srgbClr val="B4C7D2"/>
+                </a:solidFill>
+                <a:latin typeface="Arial"/>
+              </a:rPr>
+              <a:t>12</a:t>
+            </a:r>
+          </a:p>
+        </p:txBody>
+      </p:sp>
+      <p:cxnSp>
+        <p:nvCxnSpPr>
+          <p:cNvPr id="30" name="C3-E08 line 28" descr="sci-ppt:o028"/>
+          <p:cNvCxnSpPr/>
+          <p:nvPr/>
+        </p:nvCxnSpPr>
+        <p:spPr>
+          <a:xfrm>
+            <a:off x="6885431" y="1371600"/>
+            <a:ext cx="64009" cy="0"/>
+          </a:xfrm>
+          <a:prstGeom prst="line">
+            <a:avLst/>
+          </a:prstGeom>
+          <a:ln w="12700">
+            <a:solidFill>
+              <a:srgbClr val="B4C7D2"/>
+            </a:solidFill>
+          </a:ln>
+          <a:effectLst/>
+        </p:spPr>
+      </p:cxnSp>
+      <p:cxnSp>
+        <p:nvCxnSpPr>
+          <p:cNvPr id="31" name="C3-E08 line 29" descr="sci-ppt:o029"/>
+          <p:cNvCxnSpPr/>
+          <p:nvPr/>
+        </p:nvCxnSpPr>
+        <p:spPr>
+          <a:xfrm>
+            <a:off x="6949440" y="1371600"/>
+            <a:ext cx="4846319" cy="0"/>
+          </a:xfrm>
+          <a:prstGeom prst="line">
+            <a:avLst/>
+          </a:prstGeom>
+          <a:ln w="7620">
+            <a:solidFill>
+              <a:srgbClr val="2E4756"/>
+            </a:solidFill>
+          </a:ln>
+          <a:effectLst/>
+        </p:spPr>
+      </p:cxnSp>
+      <p:sp>
+        <p:nvSpPr>
+          <p:cNvPr id="32" name="C3-E08 text 30" descr="sci-ppt:o030"/>
+          <p:cNvSpPr txBox="1"/>
+          <p:nvPr/>
+        </p:nvSpPr>
+        <p:spPr>
+          <a:xfrm>
+            <a:off x="6080759" y="1289304"/>
+            <a:ext cx="777240" cy="208407"/>
+          </a:xfrm>
+          <a:prstGeom prst="rect">
+            <a:avLst/>
+          </a:prstGeom>
+          <a:noFill/>
+          <a:effectLst/>
+        </p:spPr>
+        <p:txBody>
+          <a:bodyPr wrap="none" lIns="18288" rIns="18288" tIns="18288" bIns="18288" anchor="t">
+            <a:spAutoFit/>
+          </a:bodyPr>
+          <a:lstStyle/>
+          <a:p>
+            <a:pPr algn="r">
+              <a:spcAft>
+                <a:spcPts val="0"/>
+              </a:spcAft>
+            </a:pPr>
+            <a:r>
+              <a:rPr sz="1050" b="0" i="0">
+                <a:solidFill>
+                  <a:srgbClr val="B4C7D2"/>
+                </a:solidFill>
+                <a:latin typeface="Arial"/>
+              </a:rPr>
+              <a:t>16</a:t>
+            </a:r>
+          </a:p>
+        </p:txBody>
+      </p:sp>
+      <p:sp>
+        <p:nvSpPr>
+          <p:cNvPr id="33" name="C3-E08 text 31" descr="sci-ppt:o031"/>
+          <p:cNvSpPr txBox="1"/>
+          <p:nvPr/>
+        </p:nvSpPr>
+        <p:spPr>
+          <a:xfrm>
+            <a:off x="6949440" y="5221224"/>
+            <a:ext cx="4846320" cy="231648"/>
+          </a:xfrm>
+          <a:prstGeom prst="rect">
+            <a:avLst/>
+          </a:prstGeom>
+          <a:noFill/>
+          <a:effectLst/>
+        </p:spPr>
+        <p:txBody>
+          <a:bodyPr wrap="none" lIns="18288" rIns="18288" tIns="18288" bIns="18288" anchor="t">
+            <a:spAutoFit/>
+          </a:bodyPr>
+          <a:lstStyle/>
+          <a:p>
+            <a:pPr algn="ctr">
+              <a:spcAft>
+                <a:spcPts val="0"/>
+              </a:spcAft>
+            </a:pPr>
+            <a:r>
+              <a:rPr sz="1200" b="0" i="0">
+                <a:solidFill>
+                  <a:srgbClr val="E7F0F3"/>
+                </a:solidFill>
+                <a:latin typeface="Arial"/>
+              </a:rPr>
+              <a:t>x = R / Rₘₐₓ</a:t>
+            </a:r>
+          </a:p>
+        </p:txBody>
+      </p:sp>
+      <p:sp>
+        <p:nvSpPr>
+          <p:cNvPr id="34" name="C3-E08 text 32" descr="sci-ppt:o032"/>
+          <p:cNvSpPr txBox="1"/>
+          <p:nvPr/>
+        </p:nvSpPr>
+        <p:spPr>
+          <a:xfrm>
+            <a:off x="6400800" y="1024128"/>
+            <a:ext cx="4846320" cy="231648"/>
+          </a:xfrm>
+          <a:prstGeom prst="rect">
+            <a:avLst/>
+          </a:prstGeom>
+          <a:noFill/>
+          <a:effectLst/>
+        </p:spPr>
+        <p:txBody>
+          <a:bodyPr wrap="none" lIns="18288" rIns="18288" tIns="18288" bIns="18288" anchor="t">
             <a:spAutoFit/>
           </a:bodyPr>
           <a:lstStyle/>
@@ -3229,27 +4027,1250 @@
               </a:spcAft>
             </a:pPr>
             <a:r>
-              <a:rPr sz="1700" b="0" i="0">
+              <a:rPr sz="1200" b="0" i="0">
                 <a:solidFill>
                   <a:srgbClr val="E7F0F3"/>
                 </a:solidFill>
                 <a:latin typeface="Arial"/>
               </a:rPr>
-              <a:t>j: source</a:t>
-            </a:r>
-          </a:p>
-        </p:txBody>
-      </p:sp>
-      <p:sp>
-        <p:nvSpPr>
-          <p:cNvPr id="6" name="C3-E08 text 4" descr="sci-ppt:o004"/>
+              <a:t>coefficient × Rₘₐₓ</a:t>
+            </a:r>
+          </a:p>
+        </p:txBody>
+      </p:sp>
+      <p:sp>
+        <p:nvSpPr>
+          <p:cNvPr id="35" name="C3-E08 polygon 33" descr="sci-ppt:o033"/>
+          <p:cNvSpPr/>
+          <p:nvPr/>
+        </p:nvSpPr>
+        <p:spPr>
+          <a:xfrm>
+            <a:off x="6970916" y="1467524"/>
+            <a:ext cx="4824843" cy="2690138"/>
+          </a:xfrm>
+          <a:custGeom>
+            <a:avLst/>
+            <a:gdLst/>
+            <a:ahLst/>
+            <a:cxnLst/>
+            <a:rect l="l" t="t" r="r" b="b"/>
+            <a:pathLst>
+              <a:path w="4824843" h="2690138">
+                <a:moveTo>
+                  <a:pt x="0" y="0"/>
+                </a:moveTo>
+                <a:lnTo>
+                  <a:pt x="39710" y="103497"/>
+                </a:lnTo>
+                <a:lnTo>
+                  <a:pt x="79421" y="200782"/>
+                </a:lnTo>
+                <a:lnTo>
+                  <a:pt x="119132" y="292400"/>
+                </a:lnTo>
+                <a:lnTo>
+                  <a:pt x="158842" y="378836"/>
+                </a:lnTo>
+                <a:lnTo>
+                  <a:pt x="198553" y="460520"/>
+                </a:lnTo>
+                <a:lnTo>
+                  <a:pt x="238264" y="537837"/>
+                </a:lnTo>
+                <a:lnTo>
+                  <a:pt x="277974" y="611130"/>
+                </a:lnTo>
+                <a:lnTo>
+                  <a:pt x="317685" y="680707"/>
+                </a:lnTo>
+                <a:lnTo>
+                  <a:pt x="357396" y="746847"/>
+                </a:lnTo>
+                <a:lnTo>
+                  <a:pt x="397106" y="809800"/>
+                </a:lnTo>
+                <a:lnTo>
+                  <a:pt x="436817" y="869793"/>
+                </a:lnTo>
+                <a:lnTo>
+                  <a:pt x="476527" y="927032"/>
+                </a:lnTo>
+                <a:lnTo>
+                  <a:pt x="516238" y="981703"/>
+                </a:lnTo>
+                <a:lnTo>
+                  <a:pt x="555949" y="1033977"/>
+                </a:lnTo>
+                <a:lnTo>
+                  <a:pt x="595659" y="1084011"/>
+                </a:lnTo>
+                <a:lnTo>
+                  <a:pt x="635370" y="1131945"/>
+                </a:lnTo>
+                <a:lnTo>
+                  <a:pt x="675081" y="1177912"/>
+                </a:lnTo>
+                <a:lnTo>
+                  <a:pt x="714791" y="1222031"/>
+                </a:lnTo>
+                <a:lnTo>
+                  <a:pt x="754502" y="1264412"/>
+                </a:lnTo>
+                <a:lnTo>
+                  <a:pt x="794213" y="1305157"/>
+                </a:lnTo>
+                <a:lnTo>
+                  <a:pt x="833923" y="1344360"/>
+                </a:lnTo>
+                <a:lnTo>
+                  <a:pt x="873634" y="1382108"/>
+                </a:lnTo>
+                <a:lnTo>
+                  <a:pt x="913345" y="1418481"/>
+                </a:lnTo>
+                <a:lnTo>
+                  <a:pt x="953055" y="1453555"/>
+                </a:lnTo>
+                <a:lnTo>
+                  <a:pt x="992766" y="1487397"/>
+                </a:lnTo>
+                <a:lnTo>
+                  <a:pt x="1032477" y="1520073"/>
+                </a:lnTo>
+                <a:lnTo>
+                  <a:pt x="1072187" y="1551643"/>
+                </a:lnTo>
+                <a:lnTo>
+                  <a:pt x="1111898" y="1582163"/>
+                </a:lnTo>
+                <a:lnTo>
+                  <a:pt x="1151608" y="1611684"/>
+                </a:lnTo>
+                <a:lnTo>
+                  <a:pt x="1191319" y="1640255"/>
+                </a:lnTo>
+                <a:lnTo>
+                  <a:pt x="1231030" y="1667923"/>
+                </a:lnTo>
+                <a:lnTo>
+                  <a:pt x="1270740" y="1694730"/>
+                </a:lnTo>
+                <a:lnTo>
+                  <a:pt x="1310451" y="1720716"/>
+                </a:lnTo>
+                <a:lnTo>
+                  <a:pt x="1350162" y="1745919"/>
+                </a:lnTo>
+                <a:lnTo>
+                  <a:pt x="1389872" y="1770374"/>
+                </a:lnTo>
+                <a:lnTo>
+                  <a:pt x="1429583" y="1794115"/>
+                </a:lnTo>
+                <a:lnTo>
+                  <a:pt x="1469294" y="1817172"/>
+                </a:lnTo>
+                <a:lnTo>
+                  <a:pt x="1509004" y="1839575"/>
+                </a:lnTo>
+                <a:lnTo>
+                  <a:pt x="1548715" y="1861352"/>
+                </a:lnTo>
+                <a:lnTo>
+                  <a:pt x="1588426" y="1882529"/>
+                </a:lnTo>
+                <a:lnTo>
+                  <a:pt x="1628136" y="1903132"/>
+                </a:lnTo>
+                <a:lnTo>
+                  <a:pt x="1667847" y="1923183"/>
+                </a:lnTo>
+                <a:lnTo>
+                  <a:pt x="1707558" y="1942704"/>
+                </a:lnTo>
+                <a:lnTo>
+                  <a:pt x="1747268" y="1961717"/>
+                </a:lnTo>
+                <a:lnTo>
+                  <a:pt x="1786979" y="1980242"/>
+                </a:lnTo>
+                <a:lnTo>
+                  <a:pt x="1826690" y="1998297"/>
+                </a:lnTo>
+                <a:lnTo>
+                  <a:pt x="1866400" y="2015901"/>
+                </a:lnTo>
+                <a:lnTo>
+                  <a:pt x="1906111" y="2033070"/>
+                </a:lnTo>
+                <a:lnTo>
+                  <a:pt x="1945821" y="2049820"/>
+                </a:lnTo>
+                <a:lnTo>
+                  <a:pt x="1985532" y="2066167"/>
+                </a:lnTo>
+                <a:lnTo>
+                  <a:pt x="2025243" y="2082126"/>
+                </a:lnTo>
+                <a:lnTo>
+                  <a:pt x="2064953" y="2097710"/>
+                </a:lnTo>
+                <a:lnTo>
+                  <a:pt x="2104664" y="2112932"/>
+                </a:lnTo>
+                <a:lnTo>
+                  <a:pt x="2144375" y="2127806"/>
+                </a:lnTo>
+                <a:lnTo>
+                  <a:pt x="2184085" y="2142343"/>
+                </a:lnTo>
+                <a:lnTo>
+                  <a:pt x="2223796" y="2156555"/>
+                </a:lnTo>
+                <a:lnTo>
+                  <a:pt x="2263507" y="2170453"/>
+                </a:lnTo>
+                <a:lnTo>
+                  <a:pt x="2303217" y="2184047"/>
+                </a:lnTo>
+                <a:lnTo>
+                  <a:pt x="2342928" y="2197347"/>
+                </a:lnTo>
+                <a:lnTo>
+                  <a:pt x="2382639" y="2210363"/>
+                </a:lnTo>
+                <a:lnTo>
+                  <a:pt x="2422349" y="2223104"/>
+                </a:lnTo>
+                <a:lnTo>
+                  <a:pt x="2462060" y="2235579"/>
+                </a:lnTo>
+                <a:lnTo>
+                  <a:pt x="2501771" y="2247796"/>
+                </a:lnTo>
+                <a:lnTo>
+                  <a:pt x="2541481" y="2259763"/>
+                </a:lnTo>
+                <a:lnTo>
+                  <a:pt x="2581192" y="2271488"/>
+                </a:lnTo>
+                <a:lnTo>
+                  <a:pt x="2620902" y="2282978"/>
+                </a:lnTo>
+                <a:lnTo>
+                  <a:pt x="2660613" y="2294241"/>
+                </a:lnTo>
+                <a:lnTo>
+                  <a:pt x="2700324" y="2305283"/>
+                </a:lnTo>
+                <a:lnTo>
+                  <a:pt x="2740034" y="2316111"/>
+                </a:lnTo>
+                <a:lnTo>
+                  <a:pt x="2779745" y="2326731"/>
+                </a:lnTo>
+                <a:lnTo>
+                  <a:pt x="2819456" y="2337149"/>
+                </a:lnTo>
+                <a:lnTo>
+                  <a:pt x="2859166" y="2347371"/>
+                </a:lnTo>
+                <a:lnTo>
+                  <a:pt x="2898877" y="2357403"/>
+                </a:lnTo>
+                <a:lnTo>
+                  <a:pt x="2938588" y="2367249"/>
+                </a:lnTo>
+                <a:lnTo>
+                  <a:pt x="2978298" y="2376915"/>
+                </a:lnTo>
+                <a:lnTo>
+                  <a:pt x="3018009" y="2386407"/>
+                </a:lnTo>
+                <a:lnTo>
+                  <a:pt x="3057720" y="2395728"/>
+                </a:lnTo>
+                <a:lnTo>
+                  <a:pt x="3097430" y="2404883"/>
+                </a:lnTo>
+                <a:lnTo>
+                  <a:pt x="3137141" y="2413878"/>
+                </a:lnTo>
+                <a:lnTo>
+                  <a:pt x="3176852" y="2422715"/>
+                </a:lnTo>
+                <a:lnTo>
+                  <a:pt x="3216562" y="2431400"/>
+                </a:lnTo>
+                <a:lnTo>
+                  <a:pt x="3256273" y="2439937"/>
+                </a:lnTo>
+                <a:lnTo>
+                  <a:pt x="3295984" y="2448328"/>
+                </a:lnTo>
+                <a:lnTo>
+                  <a:pt x="3335694" y="2456578"/>
+                </a:lnTo>
+                <a:lnTo>
+                  <a:pt x="3375405" y="2464691"/>
+                </a:lnTo>
+                <a:lnTo>
+                  <a:pt x="3415115" y="2472670"/>
+                </a:lnTo>
+                <a:lnTo>
+                  <a:pt x="3454826" y="2480518"/>
+                </a:lnTo>
+                <a:lnTo>
+                  <a:pt x="3494537" y="2488238"/>
+                </a:lnTo>
+                <a:lnTo>
+                  <a:pt x="3534247" y="2495835"/>
+                </a:lnTo>
+                <a:lnTo>
+                  <a:pt x="3573958" y="2503310"/>
+                </a:lnTo>
+                <a:lnTo>
+                  <a:pt x="3613669" y="2510666"/>
+                </a:lnTo>
+                <a:lnTo>
+                  <a:pt x="3653379" y="2517907"/>
+                </a:lnTo>
+                <a:lnTo>
+                  <a:pt x="3693090" y="2525036"/>
+                </a:lnTo>
+                <a:lnTo>
+                  <a:pt x="3732801" y="2532054"/>
+                </a:lnTo>
+                <a:lnTo>
+                  <a:pt x="3772511" y="2538965"/>
+                </a:lnTo>
+                <a:lnTo>
+                  <a:pt x="3812222" y="2545771"/>
+                </a:lnTo>
+                <a:lnTo>
+                  <a:pt x="3851933" y="2552474"/>
+                </a:lnTo>
+                <a:lnTo>
+                  <a:pt x="3891643" y="2559077"/>
+                </a:lnTo>
+                <a:lnTo>
+                  <a:pt x="3931354" y="2565582"/>
+                </a:lnTo>
+                <a:lnTo>
+                  <a:pt x="3971065" y="2571991"/>
+                </a:lnTo>
+                <a:lnTo>
+                  <a:pt x="4010775" y="2578307"/>
+                </a:lnTo>
+                <a:lnTo>
+                  <a:pt x="4050486" y="2584531"/>
+                </a:lnTo>
+                <a:lnTo>
+                  <a:pt x="4090196" y="2590665"/>
+                </a:lnTo>
+                <a:lnTo>
+                  <a:pt x="4129907" y="2596712"/>
+                </a:lnTo>
+                <a:lnTo>
+                  <a:pt x="4169618" y="2602673"/>
+                </a:lnTo>
+                <a:lnTo>
+                  <a:pt x="4209328" y="2608551"/>
+                </a:lnTo>
+                <a:lnTo>
+                  <a:pt x="4249039" y="2614346"/>
+                </a:lnTo>
+                <a:lnTo>
+                  <a:pt x="4288750" y="2620061"/>
+                </a:lnTo>
+                <a:lnTo>
+                  <a:pt x="4328460" y="2625698"/>
+                </a:lnTo>
+                <a:lnTo>
+                  <a:pt x="4368171" y="2631257"/>
+                </a:lnTo>
+                <a:lnTo>
+                  <a:pt x="4407882" y="2636741"/>
+                </a:lnTo>
+                <a:lnTo>
+                  <a:pt x="4447592" y="2642151"/>
+                </a:lnTo>
+                <a:lnTo>
+                  <a:pt x="4487303" y="2647489"/>
+                </a:lnTo>
+                <a:lnTo>
+                  <a:pt x="4527014" y="2652756"/>
+                </a:lnTo>
+                <a:lnTo>
+                  <a:pt x="4566724" y="2657954"/>
+                </a:lnTo>
+                <a:lnTo>
+                  <a:pt x="4606435" y="2663083"/>
+                </a:lnTo>
+                <a:lnTo>
+                  <a:pt x="4646146" y="2668146"/>
+                </a:lnTo>
+                <a:lnTo>
+                  <a:pt x="4685856" y="2673143"/>
+                </a:lnTo>
+                <a:lnTo>
+                  <a:pt x="4725567" y="2678077"/>
+                </a:lnTo>
+                <a:lnTo>
+                  <a:pt x="4765278" y="2682947"/>
+                </a:lnTo>
+                <a:lnTo>
+                  <a:pt x="4804988" y="2687756"/>
+                </a:lnTo>
+                <a:lnTo>
+                  <a:pt x="4824843" y="2690138"/>
+                </a:lnTo>
+              </a:path>
+            </a:pathLst>
+          </a:custGeom>
+          <a:noFill/>
+          <a:ln w="38100">
+            <a:solidFill>
+              <a:srgbClr val="F2B880"/>
+            </a:solidFill>
+          </a:ln>
+          <a:effectLst/>
+        </p:spPr>
+        <p:txBody>
+          <a:bodyPr rtlCol="0" anchor="ctr"/>
+          <a:lstStyle/>
+          <a:p>
+            <a:pPr algn="ctr"/>
+          </a:p>
+        </p:txBody>
+      </p:sp>
+      <p:sp>
+        <p:nvSpPr>
+          <p:cNvPr id="36" name="C3-E08 polygon 34" descr="sci-ppt:o034"/>
+          <p:cNvSpPr/>
+          <p:nvPr/>
+        </p:nvSpPr>
+        <p:spPr>
+          <a:xfrm>
+            <a:off x="6970916" y="1652714"/>
+            <a:ext cx="4824843" cy="2616391"/>
+          </a:xfrm>
+          <a:custGeom>
+            <a:avLst/>
+            <a:gdLst/>
+            <a:ahLst/>
+            <a:cxnLst/>
+            <a:rect l="l" t="t" r="r" b="b"/>
+            <a:pathLst>
+              <a:path w="4824843" h="2616391">
+                <a:moveTo>
+                  <a:pt x="0" y="0"/>
+                </a:moveTo>
+                <a:lnTo>
+                  <a:pt x="39710" y="102495"/>
+                </a:lnTo>
+                <a:lnTo>
+                  <a:pt x="79421" y="198787"/>
+                </a:lnTo>
+                <a:lnTo>
+                  <a:pt x="119132" y="289423"/>
+                </a:lnTo>
+                <a:lnTo>
+                  <a:pt x="158842" y="374888"/>
+                </a:lnTo>
+                <a:lnTo>
+                  <a:pt x="198553" y="455611"/>
+                </a:lnTo>
+                <a:lnTo>
+                  <a:pt x="238264" y="531977"/>
+                </a:lnTo>
+                <a:lnTo>
+                  <a:pt x="277974" y="604329"/>
+                </a:lnTo>
+                <a:lnTo>
+                  <a:pt x="317685" y="672975"/>
+                </a:lnTo>
+                <a:lnTo>
+                  <a:pt x="357396" y="738194"/>
+                </a:lnTo>
+                <a:lnTo>
+                  <a:pt x="397106" y="800235"/>
+                </a:lnTo>
+                <a:lnTo>
+                  <a:pt x="436817" y="859325"/>
+                </a:lnTo>
+                <a:lnTo>
+                  <a:pt x="476527" y="915671"/>
+                </a:lnTo>
+                <a:lnTo>
+                  <a:pt x="516238" y="969458"/>
+                </a:lnTo>
+                <a:lnTo>
+                  <a:pt x="555949" y="1020857"/>
+                </a:lnTo>
+                <a:lnTo>
+                  <a:pt x="595659" y="1070024"/>
+                </a:lnTo>
+                <a:lnTo>
+                  <a:pt x="635370" y="1117101"/>
+                </a:lnTo>
+                <a:lnTo>
+                  <a:pt x="675081" y="1162219"/>
+                </a:lnTo>
+                <a:lnTo>
+                  <a:pt x="714791" y="1205496"/>
+                </a:lnTo>
+                <a:lnTo>
+                  <a:pt x="754502" y="1247045"/>
+                </a:lnTo>
+                <a:lnTo>
+                  <a:pt x="794213" y="1286966"/>
+                </a:lnTo>
+                <a:lnTo>
+                  <a:pt x="833923" y="1325353"/>
+                </a:lnTo>
+                <a:lnTo>
+                  <a:pt x="873634" y="1362293"/>
+                </a:lnTo>
+                <a:lnTo>
+                  <a:pt x="913345" y="1397866"/>
+                </a:lnTo>
+                <a:lnTo>
+                  <a:pt x="953055" y="1432146"/>
+                </a:lnTo>
+                <a:lnTo>
+                  <a:pt x="992766" y="1465203"/>
+                </a:lnTo>
+                <a:lnTo>
+                  <a:pt x="1032477" y="1497102"/>
+                </a:lnTo>
+                <a:lnTo>
+                  <a:pt x="1072187" y="1527901"/>
+                </a:lnTo>
+                <a:lnTo>
+                  <a:pt x="1111898" y="1557658"/>
+                </a:lnTo>
+                <a:lnTo>
+                  <a:pt x="1151608" y="1586423"/>
+                </a:lnTo>
+                <a:lnTo>
+                  <a:pt x="1191319" y="1614246"/>
+                </a:lnTo>
+                <a:lnTo>
+                  <a:pt x="1231030" y="1641172"/>
+                </a:lnTo>
+                <a:lnTo>
+                  <a:pt x="1270740" y="1667245"/>
+                </a:lnTo>
+                <a:lnTo>
+                  <a:pt x="1310451" y="1692503"/>
+                </a:lnTo>
+                <a:lnTo>
+                  <a:pt x="1350162" y="1716984"/>
+                </a:lnTo>
+                <a:lnTo>
+                  <a:pt x="1389872" y="1740724"/>
+                </a:lnTo>
+                <a:lnTo>
+                  <a:pt x="1429583" y="1763756"/>
+                </a:lnTo>
+                <a:lnTo>
+                  <a:pt x="1469294" y="1786111"/>
+                </a:lnTo>
+                <a:lnTo>
+                  <a:pt x="1509004" y="1807819"/>
+                </a:lnTo>
+                <a:lnTo>
+                  <a:pt x="1548715" y="1828907"/>
+                </a:lnTo>
+                <a:lnTo>
+                  <a:pt x="1588426" y="1849401"/>
+                </a:lnTo>
+                <a:lnTo>
+                  <a:pt x="1628136" y="1869326"/>
+                </a:lnTo>
+                <a:lnTo>
+                  <a:pt x="1667847" y="1888706"/>
+                </a:lnTo>
+                <a:lnTo>
+                  <a:pt x="1707558" y="1907563"/>
+                </a:lnTo>
+                <a:lnTo>
+                  <a:pt x="1747268" y="1925917"/>
+                </a:lnTo>
+                <a:lnTo>
+                  <a:pt x="1786979" y="1943788"/>
+                </a:lnTo>
+                <a:lnTo>
+                  <a:pt x="1826690" y="1961195"/>
+                </a:lnTo>
+                <a:lnTo>
+                  <a:pt x="1866400" y="1978157"/>
+                </a:lnTo>
+                <a:lnTo>
+                  <a:pt x="1906111" y="1994689"/>
+                </a:lnTo>
+                <a:lnTo>
+                  <a:pt x="1945821" y="2010808"/>
+                </a:lnTo>
+                <a:lnTo>
+                  <a:pt x="1985532" y="2026530"/>
+                </a:lnTo>
+                <a:lnTo>
+                  <a:pt x="2025243" y="2041868"/>
+                </a:lnTo>
+                <a:lnTo>
+                  <a:pt x="2064953" y="2056837"/>
+                </a:lnTo>
+                <a:lnTo>
+                  <a:pt x="2104664" y="2071449"/>
+                </a:lnTo>
+                <a:lnTo>
+                  <a:pt x="2144375" y="2085718"/>
+                </a:lnTo>
+                <a:lnTo>
+                  <a:pt x="2184085" y="2099656"/>
+                </a:lnTo>
+                <a:lnTo>
+                  <a:pt x="2223796" y="2113273"/>
+                </a:lnTo>
+                <a:lnTo>
+                  <a:pt x="2263507" y="2126581"/>
+                </a:lnTo>
+                <a:lnTo>
+                  <a:pt x="2303217" y="2139590"/>
+                </a:lnTo>
+                <a:lnTo>
+                  <a:pt x="2342928" y="2152310"/>
+                </a:lnTo>
+                <a:lnTo>
+                  <a:pt x="2382639" y="2164751"/>
+                </a:lnTo>
+                <a:lnTo>
+                  <a:pt x="2422349" y="2176921"/>
+                </a:lnTo>
+                <a:lnTo>
+                  <a:pt x="2462060" y="2188830"/>
+                </a:lnTo>
+                <a:lnTo>
+                  <a:pt x="2501771" y="2200485"/>
+                </a:lnTo>
+                <a:lnTo>
+                  <a:pt x="2541481" y="2211896"/>
+                </a:lnTo>
+                <a:lnTo>
+                  <a:pt x="2581192" y="2223068"/>
+                </a:lnTo>
+                <a:lnTo>
+                  <a:pt x="2620902" y="2234011"/>
+                </a:lnTo>
+                <a:lnTo>
+                  <a:pt x="2660613" y="2244730"/>
+                </a:lnTo>
+                <a:lnTo>
+                  <a:pt x="2700324" y="2255233"/>
+                </a:lnTo>
+                <a:lnTo>
+                  <a:pt x="2740034" y="2265526"/>
+                </a:lnTo>
+                <a:lnTo>
+                  <a:pt x="2779745" y="2275615"/>
+                </a:lnTo>
+                <a:lnTo>
+                  <a:pt x="2819456" y="2285506"/>
+                </a:lnTo>
+                <a:lnTo>
+                  <a:pt x="2859166" y="2295206"/>
+                </a:lnTo>
+                <a:lnTo>
+                  <a:pt x="2898877" y="2304719"/>
+                </a:lnTo>
+                <a:lnTo>
+                  <a:pt x="2938588" y="2314051"/>
+                </a:lnTo>
+                <a:lnTo>
+                  <a:pt x="2978298" y="2323207"/>
+                </a:lnTo>
+                <a:lnTo>
+                  <a:pt x="3018009" y="2332191"/>
+                </a:lnTo>
+                <a:lnTo>
+                  <a:pt x="3057720" y="2341010"/>
+                </a:lnTo>
+                <a:lnTo>
+                  <a:pt x="3097430" y="2349667"/>
+                </a:lnTo>
+                <a:lnTo>
+                  <a:pt x="3137141" y="2358166"/>
+                </a:lnTo>
+                <a:lnTo>
+                  <a:pt x="3176852" y="2366513"/>
+                </a:lnTo>
+                <a:lnTo>
+                  <a:pt x="3216562" y="2374710"/>
+                </a:lnTo>
+                <a:lnTo>
+                  <a:pt x="3256273" y="2382763"/>
+                </a:lnTo>
+                <a:lnTo>
+                  <a:pt x="3295984" y="2390674"/>
+                </a:lnTo>
+                <a:lnTo>
+                  <a:pt x="3335694" y="2398448"/>
+                </a:lnTo>
+                <a:lnTo>
+                  <a:pt x="3375405" y="2406087"/>
+                </a:lnTo>
+                <a:lnTo>
+                  <a:pt x="3415115" y="2413596"/>
+                </a:lnTo>
+                <a:lnTo>
+                  <a:pt x="3454826" y="2420978"/>
+                </a:lnTo>
+                <a:lnTo>
+                  <a:pt x="3494537" y="2428236"/>
+                </a:lnTo>
+                <a:lnTo>
+                  <a:pt x="3534247" y="2435373"/>
+                </a:lnTo>
+                <a:lnTo>
+                  <a:pt x="3573958" y="2442393"/>
+                </a:lnTo>
+                <a:lnTo>
+                  <a:pt x="3613669" y="2449297"/>
+                </a:lnTo>
+                <a:lnTo>
+                  <a:pt x="3653379" y="2456089"/>
+                </a:lnTo>
+                <a:lnTo>
+                  <a:pt x="3693090" y="2462771"/>
+                </a:lnTo>
+                <a:lnTo>
+                  <a:pt x="3732801" y="2469346"/>
+                </a:lnTo>
+                <a:lnTo>
+                  <a:pt x="3772511" y="2475818"/>
+                </a:lnTo>
+                <a:lnTo>
+                  <a:pt x="3812222" y="2482187"/>
+                </a:lnTo>
+                <a:lnTo>
+                  <a:pt x="3851933" y="2488457"/>
+                </a:lnTo>
+                <a:lnTo>
+                  <a:pt x="3891643" y="2494629"/>
+                </a:lnTo>
+                <a:lnTo>
+                  <a:pt x="3931354" y="2500707"/>
+                </a:lnTo>
+                <a:lnTo>
+                  <a:pt x="3971065" y="2506692"/>
+                </a:lnTo>
+                <a:lnTo>
+                  <a:pt x="4010775" y="2512586"/>
+                </a:lnTo>
+                <a:lnTo>
+                  <a:pt x="4050486" y="2518392"/>
+                </a:lnTo>
+                <a:lnTo>
+                  <a:pt x="4090196" y="2524111"/>
+                </a:lnTo>
+                <a:lnTo>
+                  <a:pt x="4129907" y="2529746"/>
+                </a:lnTo>
+                <a:lnTo>
+                  <a:pt x="4169618" y="2535297"/>
+                </a:lnTo>
+                <a:lnTo>
+                  <a:pt x="4209328" y="2540768"/>
+                </a:lnTo>
+                <a:lnTo>
+                  <a:pt x="4249039" y="2546159"/>
+                </a:lnTo>
+                <a:lnTo>
+                  <a:pt x="4288750" y="2551473"/>
+                </a:lnTo>
+                <a:lnTo>
+                  <a:pt x="4328460" y="2556711"/>
+                </a:lnTo>
+                <a:lnTo>
+                  <a:pt x="4368171" y="2561875"/>
+                </a:lnTo>
+                <a:lnTo>
+                  <a:pt x="4407882" y="2566965"/>
+                </a:lnTo>
+                <a:lnTo>
+                  <a:pt x="4447592" y="2571985"/>
+                </a:lnTo>
+                <a:lnTo>
+                  <a:pt x="4487303" y="2576935"/>
+                </a:lnTo>
+                <a:lnTo>
+                  <a:pt x="4527014" y="2581817"/>
+                </a:lnTo>
+                <a:lnTo>
+                  <a:pt x="4566724" y="2586632"/>
+                </a:lnTo>
+                <a:lnTo>
+                  <a:pt x="4606435" y="2591381"/>
+                </a:lnTo>
+                <a:lnTo>
+                  <a:pt x="4646146" y="2596067"/>
+                </a:lnTo>
+                <a:lnTo>
+                  <a:pt x="4685856" y="2600689"/>
+                </a:lnTo>
+                <a:lnTo>
+                  <a:pt x="4725567" y="2605250"/>
+                </a:lnTo>
+                <a:lnTo>
+                  <a:pt x="4765278" y="2609750"/>
+                </a:lnTo>
+                <a:lnTo>
+                  <a:pt x="4804988" y="2614192"/>
+                </a:lnTo>
+                <a:lnTo>
+                  <a:pt x="4824843" y="2616391"/>
+                </a:lnTo>
+              </a:path>
+            </a:pathLst>
+          </a:custGeom>
+          <a:noFill/>
+          <a:ln w="25400">
+            <a:solidFill>
+              <a:srgbClr val="8EDBD4"/>
+            </a:solidFill>
+            <a:prstDash val="dash"/>
+          </a:ln>
+          <a:effectLst/>
+        </p:spPr>
+        <p:txBody>
+          <a:bodyPr rtlCol="0" anchor="ctr"/>
+          <a:lstStyle/>
+          <a:p>
+            <a:pPr algn="ctr"/>
+          </a:p>
+        </p:txBody>
+      </p:sp>
+      <p:sp>
+        <p:nvSpPr>
+          <p:cNvPr id="37" name="C3-E08 polygon 35" descr="sci-ppt:o035"/>
+          <p:cNvSpPr/>
+          <p:nvPr/>
+        </p:nvSpPr>
+        <p:spPr>
+          <a:xfrm>
+            <a:off x="6970916" y="4752569"/>
+            <a:ext cx="4824843" cy="73748"/>
+          </a:xfrm>
+          <a:custGeom>
+            <a:avLst/>
+            <a:gdLst/>
+            <a:ahLst/>
+            <a:cxnLst/>
+            <a:rect l="l" t="t" r="r" b="b"/>
+            <a:pathLst>
+              <a:path w="4824843" h="73748">
+                <a:moveTo>
+                  <a:pt x="0" y="0"/>
+                </a:moveTo>
+                <a:lnTo>
+                  <a:pt x="39710" y="1003"/>
+                </a:lnTo>
+                <a:lnTo>
+                  <a:pt x="79421" y="1996"/>
+                </a:lnTo>
+                <a:lnTo>
+                  <a:pt x="119132" y="2977"/>
+                </a:lnTo>
+                <a:lnTo>
+                  <a:pt x="158842" y="3949"/>
+                </a:lnTo>
+                <a:lnTo>
+                  <a:pt x="198553" y="4910"/>
+                </a:lnTo>
+                <a:lnTo>
+                  <a:pt x="238264" y="5860"/>
+                </a:lnTo>
+                <a:lnTo>
+                  <a:pt x="277974" y="6801"/>
+                </a:lnTo>
+                <a:lnTo>
+                  <a:pt x="317685" y="7732"/>
+                </a:lnTo>
+                <a:lnTo>
+                  <a:pt x="357396" y="8654"/>
+                </a:lnTo>
+                <a:lnTo>
+                  <a:pt x="397106" y="9566"/>
+                </a:lnTo>
+                <a:lnTo>
+                  <a:pt x="436817" y="10468"/>
+                </a:lnTo>
+                <a:lnTo>
+                  <a:pt x="476527" y="11361"/>
+                </a:lnTo>
+                <a:lnTo>
+                  <a:pt x="516238" y="12246"/>
+                </a:lnTo>
+                <a:lnTo>
+                  <a:pt x="555949" y="13121"/>
+                </a:lnTo>
+                <a:lnTo>
+                  <a:pt x="595659" y="13987"/>
+                </a:lnTo>
+                <a:lnTo>
+                  <a:pt x="635370" y="14845"/>
+                </a:lnTo>
+                <a:lnTo>
+                  <a:pt x="675081" y="15694"/>
+                </a:lnTo>
+                <a:lnTo>
+                  <a:pt x="714791" y="16535"/>
+                </a:lnTo>
+                <a:lnTo>
+                  <a:pt x="754502" y="17367"/>
+                </a:lnTo>
+                <a:lnTo>
+                  <a:pt x="794213" y="18192"/>
+                </a:lnTo>
+                <a:lnTo>
+                  <a:pt x="833923" y="19008"/>
+                </a:lnTo>
+                <a:lnTo>
+                  <a:pt x="873634" y="19816"/>
+                </a:lnTo>
+                <a:lnTo>
+                  <a:pt x="913345" y="20616"/>
+                </a:lnTo>
+                <a:lnTo>
+                  <a:pt x="953055" y="21409"/>
+                </a:lnTo>
+                <a:lnTo>
+                  <a:pt x="992766" y="22194"/>
+                </a:lnTo>
+                <a:lnTo>
+                  <a:pt x="1032477" y="22972"/>
+                </a:lnTo>
+                <a:lnTo>
+                  <a:pt x="1072187" y="23742"/>
+                </a:lnTo>
+                <a:lnTo>
+                  <a:pt x="1111898" y="24505"/>
+                </a:lnTo>
+                <a:lnTo>
+                  <a:pt x="1151608" y="25261"/>
+                </a:lnTo>
+                <a:lnTo>
+                  <a:pt x="1191319" y="26010"/>
+                </a:lnTo>
+                <a:lnTo>
+                  <a:pt x="1231030" y="26751"/>
+                </a:lnTo>
+                <a:lnTo>
+                  <a:pt x="1270740" y="27486"/>
+                </a:lnTo>
+                <a:lnTo>
+                  <a:pt x="1310451" y="28214"/>
+                </a:lnTo>
+                <a:lnTo>
+                  <a:pt x="1350162" y="28936"/>
+                </a:lnTo>
+                <a:lnTo>
+                  <a:pt x="1389872" y="29651"/>
+                </a:lnTo>
+                <a:lnTo>
+                  <a:pt x="1429583" y="30359"/>
+                </a:lnTo>
+                <a:lnTo>
+                  <a:pt x="1469294" y="31061"/>
+                </a:lnTo>
+                <a:lnTo>
+                  <a:pt x="1509004" y="31756"/>
+                </a:lnTo>
+                <a:lnTo>
+                  <a:pt x="1548715" y="32446"/>
+                </a:lnTo>
+                <a:lnTo>
+                  <a:pt x="1588426" y="33129"/>
+                </a:lnTo>
+                <a:lnTo>
+                  <a:pt x="1628136" y="33806"/>
+                </a:lnTo>
+                <a:lnTo>
+                  <a:pt x="1667847" y="34477"/>
+                </a:lnTo>
+                <a:lnTo>
+                  <a:pt x="1707558" y="35142"/>
+                </a:lnTo>
+                <a:lnTo>
+                  <a:pt x="1747268" y="35801"/>
+                </a:lnTo>
+                <a:lnTo>
+                  <a:pt x="1786979" y="36455"/>
+                </a:lnTo>
+                <a:lnTo>
+                  <a:pt x="1826690" y="37102"/>
+                </a:lnTo>
+                <a:lnTo>
+                  <a:pt x="1866400" y="37745"/>
+                </a:lnTo>
+                <a:lnTo>
+                  <a:pt x="1906111" y="38381"/>
+                </a:lnTo>
+                <a:lnTo>
+                  <a:pt x="1945821" y="39012"/>
+                </a:lnTo>
+                <a:lnTo>
+                  <a:pt x="1985532" y="39638"/>
+                </a:lnTo>
+                <a:lnTo>
+                  <a:pt x="2025243" y="40259"/>
+                </a:lnTo>
+                <a:lnTo>
+                  <a:pt x="2064953" y="40874"/>
+                </a:lnTo>
+                <a:lnTo>
+                  <a:pt x="2104664" y="41484"/>
+                </a:lnTo>
+                <a:lnTo>
+                  <a:pt x="2144375" y="42088"/>
+                </a:lnTo>
+                <a:lnTo>
+                  <a:pt x="2184085" y="42688"/>
+                </a:lnTo>
+                <a:lnTo>
+                  <a:pt x="2223796" y="43283"/>
+                </a:lnTo>
+                <a:lnTo>
+                  <a:pt x="2263507" y="43873"/>
+                </a:lnTo>
+                <a:lnTo>
+                  <a:pt x="2303217" y="44458"/>
+                </a:lnTo>
+                <a:lnTo>
+                  <a:pt x="2342928" y="45038"/>
+                </a:lnTo>
+                <a:lnTo>
+                  <a:pt x="2382639" y="45613"/>
+                </a:lnTo>
+                <a:lnTo>
+                  <a:pt x="2422349" y="46184"/>
+                </a:lnTo>
+                <a:lnTo>
+                  <a:pt x="2462060" y="46750"/>
+                </a:lnTo>
+                <a:lnTo>
+                  <a:pt x="2501771" y="47311"/>
+                </a:lnTo>
+                <a:lnTo>
+                  <a:pt x="2541481" y="47868"/>
+                </a:lnTo>
+                <a:lnTo>
+                  <a:pt x="2581192" y="48420"/>
+                </a:lnTo>
+                <a:lnTo>
+                  <a:pt x="2620902" y="48968"/>
+                </a:lnTo>
+                <a:lnTo>
+                  <a:pt x="2660613" y="49512"/>
+                </a:lnTo>
+                <a:lnTo>
+                  <a:pt x="2700324" y="50051"/>
+                </a:lnTo>
+                <a:lnTo>
+                  <a:pt x="2740034" y="50586"/>
+                </a:lnTo>
+                <a:lnTo>
+                  <a:pt x="2779745" y="51117"/>
+                </a:lnTo>
+                <a:lnTo>
+                  <a:pt x="2819456" y="51644"/>
+                </a:lnTo>
+                <a:lnTo>
+                  <a:pt x="2859166" y="52166"/>
+                </a:lnTo>
+                <a:lnTo>
+                  <a:pt x="2898877" y="52684"/>
+                </a:lnTo>
+                <a:lnTo>
+                  <a:pt x="2938588" y="53199"/>
+                </a:lnTo>
+                <a:lnTo>
+                  <a:pt x="2978298" y="53709"/>
+                </a:lnTo>
+                <a:lnTo>
+                  <a:pt x="3018009" y="54216"/>
+                </a:lnTo>
+                <a:lnTo>
+                  <a:pt x="3057720" y="54718"/>
+                </a:lnTo>
+                <a:lnTo>
+                  <a:pt x="3097430" y="55217"/>
+                </a:lnTo>
+                <a:lnTo>
+                  <a:pt x="3137141" y="55712"/>
+                </a:lnTo>
+                <a:lnTo>
+                  <a:pt x="3176852" y="56203"/>
+                </a:lnTo>
+                <a:lnTo>
+                  <a:pt x="3216562" y="56691"/>
+                </a:lnTo>
+                <a:lnTo>
+                  <a:pt x="3256273" y="57174"/>
+                </a:lnTo>
+                <a:lnTo>
+                  <a:pt x="3295984" y="57655"/>
+                </a:lnTo>
+                <a:lnTo>
+                  <a:pt x="3335694" y="58131"/>
+                </a:lnTo>
+                <a:lnTo>
+                  <a:pt x="3375405" y="58604"/>
+                </a:lnTo>
+                <a:lnTo>
+                  <a:pt x="3415115" y="59074"/>
+                </a:lnTo>
+                <a:lnTo>
+                  <a:pt x="3454826" y="59540"/>
+                </a:lnTo>
+                <a:lnTo>
+                  <a:pt x="3494537" y="60002"/>
+                </a:lnTo>
+                <a:lnTo>
+                  <a:pt x="3534247" y="60462"/>
+                </a:lnTo>
+                <a:lnTo>
+                  <a:pt x="3573958" y="60918"/>
+                </a:lnTo>
+                <a:lnTo>
+                  <a:pt x="3613669" y="61370"/>
+                </a:lnTo>
+                <a:lnTo>
+                  <a:pt x="3653379" y="61819"/>
+                </a:lnTo>
+                <a:lnTo>
+                  <a:pt x="3693090" y="62265"/>
+                </a:lnTo>
+                <a:lnTo>
+                  <a:pt x="3732801" y="62708"/>
+                </a:lnTo>
+                <a:lnTo>
+                  <a:pt x="3772511" y="63148"/>
+                </a:lnTo>
+                <a:lnTo>
+                  <a:pt x="3812222" y="63584"/>
+                </a:lnTo>
+                <a:lnTo>
+                  <a:pt x="3851933" y="64018"/>
+                </a:lnTo>
+                <a:lnTo>
+                  <a:pt x="3891643" y="64448"/>
+                </a:lnTo>
+                <a:lnTo>
+                  <a:pt x="3931354" y="64875"/>
+                </a:lnTo>
+                <a:lnTo>
+                  <a:pt x="3971065" y="65299"/>
+                </a:lnTo>
+                <a:lnTo>
+                  <a:pt x="4010775" y="65721"/>
+                </a:lnTo>
+                <a:lnTo>
+                  <a:pt x="4050486" y="66139"/>
+                </a:lnTo>
+                <a:lnTo>
+                  <a:pt x="4090196" y="66554"/>
+                </a:lnTo>
+                <a:lnTo>
+                  <a:pt x="4129907" y="66967"/>
+                </a:lnTo>
+                <a:lnTo>
+                  <a:pt x="4169618" y="67377"/>
+                </a:lnTo>
+                <a:lnTo>
+                  <a:pt x="4209328" y="67783"/>
+                </a:lnTo>
+                <a:lnTo>
+                  <a:pt x="4249039" y="68187"/>
+                </a:lnTo>
+                <a:lnTo>
+                  <a:pt x="4288750" y="68589"/>
+                </a:lnTo>
+                <a:lnTo>
+                  <a:pt x="4328460" y="68987"/>
+                </a:lnTo>
+                <a:lnTo>
+                  <a:pt x="4368171" y="69383"/>
+                </a:lnTo>
+                <a:lnTo>
+                  <a:pt x="4407882" y="69776"/>
+                </a:lnTo>
+                <a:lnTo>
+                  <a:pt x="4447592" y="70166"/>
+                </a:lnTo>
+                <a:lnTo>
+                  <a:pt x="4487303" y="70554"/>
+                </a:lnTo>
+                <a:lnTo>
+                  <a:pt x="4527014" y="70939"/>
+                </a:lnTo>
+                <a:lnTo>
+                  <a:pt x="4566724" y="71322"/>
+                </a:lnTo>
+                <a:lnTo>
+                  <a:pt x="4606435" y="71702"/>
+                </a:lnTo>
+                <a:lnTo>
+                  <a:pt x="4646146" y="72080"/>
+                </a:lnTo>
+                <a:lnTo>
+                  <a:pt x="4685856" y="72455"/>
+                </a:lnTo>
+                <a:lnTo>
+                  <a:pt x="4725567" y="72827"/>
+                </a:lnTo>
+                <a:lnTo>
+                  <a:pt x="4765278" y="73197"/>
+                </a:lnTo>
+                <a:lnTo>
+                  <a:pt x="4804988" y="73565"/>
+                </a:lnTo>
+                <a:lnTo>
+                  <a:pt x="4824843" y="73748"/>
+                </a:lnTo>
+              </a:path>
+            </a:pathLst>
+          </a:custGeom>
+          <a:noFill/>
+          <a:ln w="25400">
+            <a:solidFill>
+              <a:srgbClr val="F28BA0"/>
+            </a:solidFill>
+            <a:prstDash val="dash"/>
+          </a:ln>
+          <a:effectLst/>
+        </p:spPr>
+        <p:txBody>
+          <a:bodyPr rtlCol="0" anchor="ctr"/>
+          <a:lstStyle/>
+          <a:p>
+            <a:pPr algn="ctr"/>
+          </a:p>
+        </p:txBody>
+      </p:sp>
+      <p:sp>
+        <p:nvSpPr>
+          <p:cNvPr id="38" name="C3-E08 text 36" descr="sci-ppt:o036"/>
           <p:cNvSpPr txBox="1"/>
           <p:nvPr/>
         </p:nvSpPr>
         <p:spPr>
           <a:xfrm>
-            <a:off x="8138160" y="1874519"/>
-            <a:ext cx="1554480" cy="365760"/>
+            <a:off x="7628381" y="1437322"/>
+            <a:ext cx="3108960" cy="223900"/>
           </a:xfrm>
           <a:prstGeom prst="rect">
             <a:avLst/>
@@ -3258,7 +5279,7 @@
           <a:effectLst/>
         </p:spPr>
         <p:txBody>
-          <a:bodyPr wrap="square" lIns="27432" rIns="27432" tIns="18288" bIns="18288" anchor="ctr">
+          <a:bodyPr wrap="none" lIns="18288" rIns="18288" tIns="18288" bIns="18288" anchor="t">
             <a:spAutoFit/>
           </a:bodyPr>
           <a:lstStyle/>
@@ -3269,49 +5290,259 @@
               </a:spcAft>
             </a:pPr>
             <a:r>
-              <a:rPr sz="1700" b="0" i="0">
+              <a:rPr sz="1150" b="0" i="0">
+                <a:solidFill>
+                  <a:srgbClr val="F2B880"/>
+                </a:solidFill>
+                <a:latin typeface="Arial"/>
+              </a:rPr>
+              <a:t>(3 + 4SR)/[R(1 + SR)], χ = 1</a:t>
+            </a:r>
+          </a:p>
+        </p:txBody>
+      </p:sp>
+      <p:sp>
+        <p:nvSpPr>
+          <p:cNvPr id="39" name="C3-E08 text 37" descr="sci-ppt:o037"/>
+          <p:cNvSpPr txBox="1"/>
+          <p:nvPr/>
+        </p:nvSpPr>
+        <p:spPr>
+          <a:xfrm>
+            <a:off x="9566909" y="3464433"/>
+            <a:ext cx="731520" cy="231648"/>
+          </a:xfrm>
+          <a:prstGeom prst="rect">
+            <a:avLst/>
+          </a:prstGeom>
+          <a:noFill/>
+          <a:effectLst/>
+        </p:spPr>
+        <p:txBody>
+          <a:bodyPr wrap="none" lIns="18288" rIns="18288" tIns="18288" bIns="18288" anchor="t">
+            <a:spAutoFit/>
+          </a:bodyPr>
+          <a:lstStyle/>
+          <a:p>
+            <a:pPr algn="l">
+              <a:spcAft>
+                <a:spcPts val="0"/>
+              </a:spcAft>
+            </a:pPr>
+            <a:r>
+              <a:rPr sz="1200" b="0" i="0">
+                <a:solidFill>
+                  <a:srgbClr val="8EDBD4"/>
+                </a:solidFill>
+                <a:latin typeface="Arial"/>
+              </a:rPr>
+              <a:t>3/R</a:t>
+            </a:r>
+          </a:p>
+        </p:txBody>
+      </p:sp>
+      <p:sp>
+        <p:nvSpPr>
+          <p:cNvPr id="40" name="C3-E08 text 38" descr="sci-ppt:o038"/>
+          <p:cNvSpPr txBox="1"/>
+          <p:nvPr/>
+        </p:nvSpPr>
+        <p:spPr>
+          <a:xfrm>
+            <a:off x="9142857" y="4511992"/>
+            <a:ext cx="1463040" cy="231648"/>
+          </a:xfrm>
+          <a:prstGeom prst="rect">
+            <a:avLst/>
+          </a:prstGeom>
+          <a:noFill/>
+          <a:effectLst/>
+        </p:spPr>
+        <p:txBody>
+          <a:bodyPr wrap="none" lIns="18288" rIns="18288" tIns="18288" bIns="18288" anchor="t">
+            <a:spAutoFit/>
+          </a:bodyPr>
+          <a:lstStyle/>
+          <a:p>
+            <a:pPr algn="l">
+              <a:spcAft>
+                <a:spcPts val="0"/>
+              </a:spcAft>
+            </a:pPr>
+            <a:r>
+              <a:rPr sz="1200" b="0" i="0">
+                <a:solidFill>
+                  <a:srgbClr val="F28BA0"/>
+                </a:solidFill>
+                <a:latin typeface="Arial"/>
+              </a:rPr>
+              <a:t>S/(1 + SR)</a:t>
+            </a:r>
+          </a:p>
+        </p:txBody>
+      </p:sp>
+      <p:sp>
+        <p:nvSpPr>
+          <p:cNvPr id="41" name="C3-E08 round_rect 39" descr="sci-ppt:o039"/>
+          <p:cNvSpPr/>
+          <p:nvPr/>
+        </p:nvSpPr>
+        <p:spPr>
+          <a:xfrm>
+            <a:off x="365760" y="914400"/>
+            <a:ext cx="6035040" cy="4846320"/>
+          </a:xfrm>
+          <a:prstGeom prst="roundRect">
+            <a:avLst/>
+          </a:prstGeom>
+          <a:solidFill>
+            <a:srgbClr val="213E4B"/>
+          </a:solidFill>
+          <a:ln w="20320">
+            <a:solidFill>
+              <a:srgbClr val="8EDBD4"/>
+            </a:solidFill>
+          </a:ln>
+          <a:effectLst/>
+        </p:spPr>
+        <p:txBody>
+          <a:bodyPr rtlCol="0" anchor="ctr"/>
+          <a:lstStyle/>
+          <a:p>
+            <a:pPr algn="ctr"/>
+          </a:p>
+        </p:txBody>
+      </p:sp>
+      <p:sp>
+        <p:nvSpPr>
+          <p:cNvPr id="42" name="C3-E08 text 40" descr="sci-ppt:o040"/>
+          <p:cNvSpPr txBox="1"/>
+          <p:nvPr/>
+        </p:nvSpPr>
+        <p:spPr>
+          <a:xfrm>
+            <a:off x="475488" y="969264"/>
+            <a:ext cx="5815583" cy="254889"/>
+          </a:xfrm>
+          <a:prstGeom prst="rect">
+            <a:avLst/>
+          </a:prstGeom>
+          <a:noFill/>
+          <a:effectLst/>
+        </p:spPr>
+        <p:txBody>
+          <a:bodyPr wrap="none" lIns="18288" rIns="18288" tIns="18288" bIns="18288" anchor="t">
+            <a:spAutoFit/>
+          </a:bodyPr>
+          <a:lstStyle/>
+          <a:p>
+            <a:pPr algn="l">
+              <a:spcAft>
+                <a:spcPts val="0"/>
+              </a:spcAft>
+            </a:pPr>
+            <a:r>
+              <a:rPr sz="1350" b="1" i="0">
+                <a:solidFill>
+                  <a:srgbClr val="8EDBD4"/>
+                </a:solidFill>
+                <a:latin typeface="Arial"/>
+              </a:rPr>
+              <a:t>Rebuilding the integrating factor</a:t>
+            </a:r>
+          </a:p>
+        </p:txBody>
+      </p:sp>
+      <p:sp>
+        <p:nvSpPr>
+          <p:cNvPr id="43" name="C3-E08 text 41" descr="sci-ppt:o041"/>
+          <p:cNvSpPr txBox="1"/>
+          <p:nvPr/>
+        </p:nvSpPr>
+        <p:spPr>
+          <a:xfrm>
+            <a:off x="548640" y="1371600"/>
+            <a:ext cx="5669280" cy="239395"/>
+          </a:xfrm>
+          <a:prstGeom prst="rect">
+            <a:avLst/>
+          </a:prstGeom>
+          <a:noFill/>
+          <a:effectLst/>
+        </p:spPr>
+        <p:txBody>
+          <a:bodyPr wrap="none" lIns="18288" rIns="18288" tIns="18288" bIns="18288" anchor="t">
+            <a:spAutoFit/>
+          </a:bodyPr>
+          <a:lstStyle/>
+          <a:p>
+            <a:pPr algn="l">
+              <a:spcAft>
+                <a:spcPts val="0"/>
+              </a:spcAft>
+            </a:pPr>
+            <a:r>
+              <a:rPr sz="1250" b="1" i="0">
+                <a:solidFill>
+                  <a:srgbClr val="F2B880"/>
+                </a:solidFill>
+                <a:latin typeface="Arial"/>
+              </a:rPr>
+              <a:t>1  y = Ṙ²,  dy/dR = 2R̈</a:t>
+            </a:r>
+          </a:p>
+        </p:txBody>
+      </p:sp>
+      <p:sp>
+        <p:nvSpPr>
+          <p:cNvPr id="44" name="C3-E08 text 42" descr="sci-ppt:o042"/>
+          <p:cNvSpPr txBox="1"/>
+          <p:nvPr/>
+        </p:nvSpPr>
+        <p:spPr>
+          <a:xfrm>
+            <a:off x="777240" y="1673352"/>
+            <a:ext cx="5486400" cy="231648"/>
+          </a:xfrm>
+          <a:prstGeom prst="rect">
+            <a:avLst/>
+          </a:prstGeom>
+          <a:noFill/>
+          <a:effectLst/>
+        </p:spPr>
+        <p:txBody>
+          <a:bodyPr wrap="none" lIns="18288" rIns="18288" tIns="18288" bIns="18288" anchor="t">
+            <a:spAutoFit/>
+          </a:bodyPr>
+          <a:lstStyle/>
+          <a:p>
+            <a:pPr algn="l">
+              <a:spcAft>
+                <a:spcPts val="0"/>
+              </a:spcAft>
+            </a:pPr>
+            <a:r>
+              <a:rPr sz="1200" b="0" i="0">
                 <a:solidFill>
                   <a:srgbClr val="E7F0F3"/>
                 </a:solidFill>
                 <a:latin typeface="Arial"/>
               </a:rPr>
-              <a:t>i: receiver</a:t>
-            </a:r>
-          </a:p>
-        </p:txBody>
-      </p:sp>
-      <p:cxnSp>
-        <p:nvCxnSpPr>
-          <p:cNvPr id="7" name="C3-E08 line 5" descr="sci-ppt:o005"/>
-          <p:cNvCxnSpPr/>
-          <p:nvPr/>
-        </p:nvCxnSpPr>
-        <p:spPr>
-          <a:xfrm>
-            <a:off x="2194560" y="3108960"/>
-            <a:ext cx="6492240" cy="0"/>
-          </a:xfrm>
-          <a:prstGeom prst="line">
-            <a:avLst/>
-          </a:prstGeom>
-          <a:ln w="25400">
-            <a:solidFill>
-              <a:srgbClr val="8EDBD4"/>
-            </a:solidFill>
-          </a:ln>
-          <a:effectLst/>
-        </p:spPr>
-      </p:cxnSp>
-      <p:sp>
-        <p:nvSpPr>
-          <p:cNvPr id="8" name="C3-E08 text 6" descr="sci-ppt:o006"/>
+              <a:t>turns the radial equation into a first-order ODE for y(R)</a:t>
+            </a:r>
+          </a:p>
+        </p:txBody>
+      </p:sp>
+      <p:sp>
+        <p:nvSpPr>
+          <p:cNvPr id="45" name="C3-E08 text 43" descr="sci-ppt:o043"/>
           <p:cNvSpPr txBox="1"/>
           <p:nvPr/>
         </p:nvSpPr>
         <p:spPr>
           <a:xfrm>
-            <a:off x="4846320" y="3200400"/>
-            <a:ext cx="1828800" cy="365760"/>
+            <a:off x="548640" y="2179320"/>
+            <a:ext cx="5669280" cy="239395"/>
           </a:xfrm>
           <a:prstGeom prst="rect">
             <a:avLst/>
@@ -3320,7 +5551,7 @@
           <a:effectLst/>
         </p:spPr>
         <p:txBody>
-          <a:bodyPr wrap="square" lIns="27432" rIns="27432" tIns="18288" bIns="18288" anchor="ctr">
+          <a:bodyPr wrap="none" lIns="18288" rIns="18288" tIns="18288" bIns="18288" anchor="t">
             <a:spAutoFit/>
           </a:bodyPr>
           <a:lstStyle/>
@@ -3331,51 +5562,67 @@
               </a:spcAft>
             </a:pPr>
             <a:r>
-              <a:rPr sz="1700" b="0" i="0">
+              <a:rPr sz="1250" b="1" i="0">
+                <a:solidFill>
+                  <a:srgbClr val="F2B880"/>
+                </a:solidFill>
+                <a:latin typeface="Arial"/>
+              </a:rPr>
+              <a:t>2  y′ + [(3 + 4SR)/(R(1 + SR))] y = −2Δp_c / [ρR(1 + SR)]</a:t>
+            </a:r>
+          </a:p>
+        </p:txBody>
+      </p:sp>
+      <p:sp>
+        <p:nvSpPr>
+          <p:cNvPr id="46" name="C3-E08 text 44" descr="sci-ppt:o044"/>
+          <p:cNvSpPr txBox="1"/>
+          <p:nvPr/>
+        </p:nvSpPr>
+        <p:spPr>
+          <a:xfrm>
+            <a:off x="777240" y="2636520"/>
+            <a:ext cx="5486400" cy="231648"/>
+          </a:xfrm>
+          <a:prstGeom prst="rect">
+            <a:avLst/>
+          </a:prstGeom>
+          <a:noFill/>
+          <a:effectLst/>
+        </p:spPr>
+        <p:txBody>
+          <a:bodyPr wrap="none" lIns="18288" rIns="18288" tIns="18288" bIns="18288" anchor="t">
+            <a:spAutoFit/>
+          </a:bodyPr>
+          <a:lstStyle/>
+          <a:p>
+            <a:pPr algn="l">
+              <a:spcAft>
+                <a:spcPts val="0"/>
+              </a:spcAft>
+            </a:pPr>
+            <a:r>
+              <a:rPr sz="1200" b="0" i="0">
                 <a:solidFill>
                   <a:srgbClr val="E7F0F3"/>
                 </a:solidFill>
                 <a:latin typeface="Arial"/>
               </a:rPr>
-              <a:t>d_ij</a:t>
-            </a:r>
-          </a:p>
-        </p:txBody>
-      </p:sp>
-      <p:cxnSp>
-        <p:nvCxnSpPr>
-          <p:cNvPr id="9" name="C3-E08 arrow 7" descr="sci-ppt:o007"/>
-          <p:cNvCxnSpPr/>
-          <p:nvPr/>
-        </p:nvCxnSpPr>
-        <p:spPr>
-          <a:xfrm>
-            <a:off x="3108960" y="2057400"/>
-            <a:ext cx="4617719" cy="0"/>
-          </a:xfrm>
-          <a:prstGeom prst="line">
-            <a:avLst/>
-          </a:prstGeom>
-          <a:ln w="25400">
-            <a:solidFill>
-              <a:srgbClr val="8EDBD4"/>
-            </a:solidFill>
-            <a:headEnd type="none" w="med" len="med"/>
-            <a:tailEnd type="triangle" w="med" len="med"/>
-          </a:ln>
-          <a:effectLst/>
-        </p:spPr>
-      </p:cxnSp>
-      <p:sp>
-        <p:nvSpPr>
-          <p:cNvPr id="10" name="C3-E08 text 8" descr="sci-ppt:o008"/>
+              <a:t>linear first order</a:t>
+            </a:r>
+          </a:p>
+        </p:txBody>
+      </p:sp>
+      <p:sp>
+        <p:nvSpPr>
+          <p:cNvPr id="47" name="C3-E08 text 45" descr="sci-ppt:o045"/>
           <p:cNvSpPr txBox="1"/>
           <p:nvPr/>
         </p:nvSpPr>
         <p:spPr>
           <a:xfrm>
-            <a:off x="3749039" y="1600200"/>
-            <a:ext cx="3931920" cy="365760"/>
+            <a:off x="548640" y="3142488"/>
+            <a:ext cx="5669280" cy="239395"/>
           </a:xfrm>
           <a:prstGeom prst="rect">
             <a:avLst/>
@@ -3384,7 +5631,7 @@
           <a:effectLst/>
         </p:spPr>
         <p:txBody>
-          <a:bodyPr wrap="square" lIns="27432" rIns="27432" tIns="18288" bIns="18288" anchor="ctr">
+          <a:bodyPr wrap="none" lIns="18288" rIns="18288" tIns="18288" bIns="18288" anchor="t">
             <a:spAutoFit/>
           </a:bodyPr>
           <a:lstStyle/>
@@ -3395,27 +5642,67 @@
               </a:spcAft>
             </a:pPr>
             <a:r>
-              <a:rPr sz="1800" b="0" i="0">
+              <a:rPr sz="1250" b="1" i="0">
+                <a:solidFill>
+                  <a:srgbClr val="F2B880"/>
+                </a:solidFill>
+                <a:latin typeface="Arial"/>
+              </a:rPr>
+              <a:t>3  (3 + 4SR)/(R(1 + SR)) = 3/R + S/(1 + SR)</a:t>
+            </a:r>
+          </a:p>
+        </p:txBody>
+      </p:sp>
+      <p:sp>
+        <p:nvSpPr>
+          <p:cNvPr id="48" name="C3-E08 text 46" descr="sci-ppt:o046"/>
+          <p:cNvSpPr txBox="1"/>
+          <p:nvPr/>
+        </p:nvSpPr>
+        <p:spPr>
+          <a:xfrm>
+            <a:off x="777240" y="3444240"/>
+            <a:ext cx="5486400" cy="231648"/>
+          </a:xfrm>
+          <a:prstGeom prst="rect">
+            <a:avLst/>
+          </a:prstGeom>
+          <a:noFill/>
+          <a:effectLst/>
+        </p:spPr>
+        <p:txBody>
+          <a:bodyPr wrap="none" lIns="18288" rIns="18288" tIns="18288" bIns="18288" anchor="t">
+            <a:spAutoFit/>
+          </a:bodyPr>
+          <a:lstStyle/>
+          <a:p>
+            <a:pPr algn="l">
+              <a:spcAft>
+                <a:spcPts val="0"/>
+              </a:spcAft>
+            </a:pPr>
+            <a:r>
+              <a:rPr sz="1200" b="0" i="0">
                 <a:solidFill>
                   <a:srgbClr val="E7F0F3"/>
                 </a:solidFill>
                 <a:latin typeface="Arial"/>
               </a:rPr>
-              <a:t>Shared liquid: ρ, p∞</a:t>
-            </a:r>
-          </a:p>
-        </p:txBody>
-      </p:sp>
-      <p:sp>
-        <p:nvSpPr>
-          <p:cNvPr id="11" name="C3-E08 text 9" descr="sci-ppt:o009"/>
+              <a:t>partial fractions: both pieces are logarithmic derivatives</a:t>
+            </a:r>
+          </a:p>
+        </p:txBody>
+      </p:sp>
+      <p:sp>
+        <p:nvSpPr>
+          <p:cNvPr id="49" name="C3-E08 text 47" descr="sci-ppt:o047"/>
           <p:cNvSpPr txBox="1"/>
           <p:nvPr/>
         </p:nvSpPr>
         <p:spPr>
           <a:xfrm>
-            <a:off x="548640" y="777240"/>
-            <a:ext cx="10972800" cy="411480"/>
+            <a:off x="548640" y="3950207"/>
+            <a:ext cx="5669280" cy="239395"/>
           </a:xfrm>
           <a:prstGeom prst="rect">
             <a:avLst/>
@@ -3424,7 +5711,7 @@
           <a:effectLst/>
         </p:spPr>
         <p:txBody>
-          <a:bodyPr wrap="square" lIns="27432" rIns="27432" tIns="18288" bIns="18288" anchor="ctr">
+          <a:bodyPr wrap="none" lIns="18288" rIns="18288" tIns="18288" bIns="18288" anchor="t">
             <a:spAutoFit/>
           </a:bodyPr>
           <a:lstStyle/>
@@ -3435,75 +5722,67 @@
               </a:spcAft>
             </a:pPr>
             <a:r>
-              <a:rPr sz="1800" b="0" i="0">
+              <a:rPr sz="1250" b="1" i="0">
+                <a:solidFill>
+                  <a:srgbClr val="F2B880"/>
+                </a:solidFill>
+                <a:latin typeface="Arial"/>
+              </a:rPr>
+              <a:t>4  integrating factor R³(1 + SR)</a:t>
+            </a:r>
+          </a:p>
+        </p:txBody>
+      </p:sp>
+      <p:sp>
+        <p:nvSpPr>
+          <p:cNvPr id="50" name="C3-E08 text 48" descr="sci-ppt:o048"/>
+          <p:cNvSpPr txBox="1"/>
+          <p:nvPr/>
+        </p:nvSpPr>
+        <p:spPr>
+          <a:xfrm>
+            <a:off x="777240" y="4251959"/>
+            <a:ext cx="5486400" cy="231648"/>
+          </a:xfrm>
+          <a:prstGeom prst="rect">
+            <a:avLst/>
+          </a:prstGeom>
+          <a:noFill/>
+          <a:effectLst/>
+        </p:spPr>
+        <p:txBody>
+          <a:bodyPr wrap="none" lIns="18288" rIns="18288" tIns="18288" bIns="18288" anchor="t">
+            <a:spAutoFit/>
+          </a:bodyPr>
+          <a:lstStyle/>
+          <a:p>
+            <a:pPr algn="l">
+              <a:spcAft>
+                <a:spcPts val="0"/>
+              </a:spcAft>
+            </a:pPr>
+            <a:r>
+              <a:rPr sz="1200" b="0" i="0">
                 <a:solidFill>
                   <a:srgbClr val="E7F0F3"/>
                 </a:solidFill>
                 <a:latin typeface="Arial"/>
               </a:rPr>
-              <a:t>Fixed centres; spherical cavities; R_i, R_j ≪ d_ij</a:t>
-            </a:r>
-          </a:p>
-        </p:txBody>
-      </p:sp>
-      <p:cxnSp>
-        <p:nvCxnSpPr>
-          <p:cNvPr id="12" name="C3-E08 arrow 10" descr="sci-ppt:o010"/>
-          <p:cNvCxnSpPr/>
-          <p:nvPr/>
-        </p:nvCxnSpPr>
-        <p:spPr>
-          <a:xfrm>
-            <a:off x="1051560" y="2057400"/>
-            <a:ext cx="347472" cy="0"/>
-          </a:xfrm>
-          <a:prstGeom prst="line">
-            <a:avLst/>
-          </a:prstGeom>
-          <a:ln w="25400">
-            <a:solidFill>
-              <a:srgbClr val="8EDBD4"/>
-            </a:solidFill>
-            <a:headEnd type="none" w="med" len="med"/>
-            <a:tailEnd type="triangle" w="med" len="med"/>
-          </a:ln>
-          <a:effectLst/>
-        </p:spPr>
-      </p:cxnSp>
-      <p:cxnSp>
-        <p:nvCxnSpPr>
-          <p:cNvPr id="13" name="C3-E08 arrow 11" descr="sci-ppt:o011"/>
-          <p:cNvCxnSpPr/>
-          <p:nvPr/>
-        </p:nvCxnSpPr>
-        <p:spPr>
-          <a:xfrm flipH="1">
-            <a:off x="2990088" y="2057400"/>
-            <a:ext cx="347472" cy="0"/>
-          </a:xfrm>
-          <a:prstGeom prst="line">
-            <a:avLst/>
-          </a:prstGeom>
-          <a:ln w="25400">
-            <a:solidFill>
-              <a:srgbClr val="8EDBD4"/>
-            </a:solidFill>
-            <a:headEnd type="none" w="med" len="med"/>
-            <a:tailEnd type="triangle" w="med" len="med"/>
-          </a:ln>
-          <a:effectLst/>
-        </p:spPr>
-      </p:cxnSp>
-      <p:sp>
-        <p:nvSpPr>
-          <p:cNvPr id="14" name="C3-E08 text 12" descr="sci-ppt:o012"/>
+              <a:t>then d/dR [R³(1 + SR) y] = −(2Δp_c/ρ) R²</a:t>
+            </a:r>
+          </a:p>
+        </p:txBody>
+      </p:sp>
+      <p:sp>
+        <p:nvSpPr>
+          <p:cNvPr id="51" name="C3-E08 text 49" descr="sci-ppt:o049"/>
           <p:cNvSpPr txBox="1"/>
           <p:nvPr/>
         </p:nvSpPr>
         <p:spPr>
           <a:xfrm>
-            <a:off x="3703320" y="2423160"/>
-            <a:ext cx="4114800" cy="457200"/>
+            <a:off x="6675120" y="5715000"/>
+            <a:ext cx="5120640" cy="417576"/>
           </a:xfrm>
           <a:prstGeom prst="rect">
             <a:avLst/>
@@ -3512,7 +5791,7 @@
           <a:effectLst/>
         </p:spPr>
         <p:txBody>
-          <a:bodyPr wrap="square" lIns="27432" rIns="27432" tIns="18288" bIns="18288" anchor="ctr">
+          <a:bodyPr wrap="none" lIns="18288" rIns="18288" tIns="18288" bIns="18288" anchor="t">
             <a:spAutoFit/>
           </a:bodyPr>
           <a:lstStyle/>
@@ -3523,27 +5802,43 @@
               </a:spcAft>
             </a:pPr>
             <a:r>
-              <a:rPr sz="1800" b="0" i="0">
+              <a:rPr sz="1200" b="0" i="0">
                 <a:solidFill>
-                  <a:srgbClr val="8EDBD4"/>
+                  <a:srgbClr val="E7F0F3"/>
                 </a:solidFill>
                 <a:latin typeface="Arial"/>
               </a:rPr>
-              <a:t>Collapse branch: Ṙ &lt; 0</a:t>
-            </a:r>
-          </a:p>
-        </p:txBody>
-      </p:sp>
-      <p:sp>
-        <p:nvSpPr>
-          <p:cNvPr id="15" name="C3-E08 text 13" descr="sci-ppt:o013"/>
+              <a:t>The two dashed pieces add to the solid curve (partial</a:t>
+            </a:r>
+          </a:p>
+          <a:p>
+            <a:pPr algn="l">
+              <a:spcAft>
+                <a:spcPts val="0"/>
+              </a:spcAft>
+            </a:pPr>
+            <a:r>
+              <a:rPr sz="1200" b="0" i="0">
+                <a:solidFill>
+                  <a:srgbClr val="E7F0F3"/>
+                </a:solidFill>
+                <a:latin typeface="Arial"/>
+              </a:rPr>
+              <a:t>fractions).</a:t>
+            </a:r>
+          </a:p>
+        </p:txBody>
+      </p:sp>
+      <p:sp>
+        <p:nvSpPr>
+          <p:cNvPr id="52" name="C3-E08 text 50" descr="sci-ppt:o050"/>
           <p:cNvSpPr txBox="1"/>
           <p:nvPr/>
         </p:nvSpPr>
         <p:spPr>
           <a:xfrm>
-            <a:off x="731520" y="3611880"/>
-            <a:ext cx="10789920" cy="274320"/>
+            <a:off x="320040" y="6510528"/>
+            <a:ext cx="11521440" cy="200660"/>
           </a:xfrm>
           <a:prstGeom prst="rect">
             <a:avLst/>
@@ -3552,349 +5847,7 @@
           <a:effectLst/>
         </p:spPr>
         <p:txBody>
-          <a:bodyPr wrap="square" lIns="27432" rIns="27432" tIns="18288" bIns="18288" anchor="ctr">
-            <a:spAutoFit/>
-          </a:bodyPr>
-          <a:lstStyle/>
-          <a:p>
-            <a:pPr algn="l">
-              <a:spcAft>
-                <a:spcPts val="0"/>
-              </a:spcAft>
-            </a:pPr>
-            <a:r>
-              <a:rPr sz="1600" b="0" i="0">
-                <a:solidFill>
-                  <a:srgbClr val="E7F0F3"/>
-                </a:solidFill>
-                <a:latin typeface="Arial"/>
-              </a:rPr>
-              <a:t>Interaction increases effective liquid inertia; it adds no source energy.</a:t>
-            </a:r>
-          </a:p>
-        </p:txBody>
-      </p:sp>
-      <p:cxnSp>
-        <p:nvCxnSpPr>
-          <p:cNvPr id="16" name="C3-E08 line 14" descr="sci-ppt:o014"/>
-          <p:cNvCxnSpPr/>
-          <p:nvPr/>
-        </p:nvCxnSpPr>
-        <p:spPr>
-          <a:xfrm>
-            <a:off x="274320" y="3977639"/>
-            <a:ext cx="11612880" cy="0"/>
-          </a:xfrm>
-          <a:prstGeom prst="line">
-            <a:avLst/>
-          </a:prstGeom>
-          <a:ln w="12700">
-            <a:solidFill>
-              <a:srgbClr val="405967"/>
-            </a:solidFill>
-          </a:ln>
-          <a:effectLst/>
-        </p:spPr>
-      </p:cxnSp>
-      <p:sp>
-        <p:nvSpPr>
-          <p:cNvPr id="17" name="C3-E08 text 15" descr="sci-ppt:o015"/>
-          <p:cNvSpPr txBox="1"/>
-          <p:nvPr/>
-        </p:nvSpPr>
-        <p:spPr>
-          <a:xfrm>
-            <a:off x="320040" y="4096512"/>
-            <a:ext cx="5715000" cy="246888"/>
-          </a:xfrm>
-          <a:prstGeom prst="rect">
-            <a:avLst/>
-          </a:prstGeom>
-          <a:noFill/>
-          <a:effectLst/>
-        </p:spPr>
-        <p:txBody>
-          <a:bodyPr wrap="square" lIns="27432" rIns="27432" tIns="18288" bIns="18288" anchor="ctr">
-            <a:spAutoFit/>
-          </a:bodyPr>
-          <a:lstStyle/>
-          <a:p>
-            <a:pPr algn="l">
-              <a:spcAft>
-                <a:spcPts val="0"/>
-              </a:spcAft>
-            </a:pPr>
-            <a:r>
-              <a:rPr sz="1150" b="0" i="0">
-                <a:solidFill>
-                  <a:srgbClr val="B4C7D2"/>
-                </a:solidFill>
-                <a:latin typeface="Arial"/>
-              </a:rPr>
-              <a:t>• R, Ṙ, R̈: contracting bubble</a:t>
-            </a:r>
-          </a:p>
-        </p:txBody>
-      </p:sp>
-      <p:sp>
-        <p:nvSpPr>
-          <p:cNvPr id="18" name="C3-E08 text 16" descr="sci-ppt:o016"/>
-          <p:cNvSpPr txBox="1"/>
-          <p:nvPr/>
-        </p:nvSpPr>
-        <p:spPr>
-          <a:xfrm>
-            <a:off x="6217920" y="4096512"/>
-            <a:ext cx="5715000" cy="246888"/>
-          </a:xfrm>
-          <a:prstGeom prst="rect">
-            <a:avLst/>
-          </a:prstGeom>
-          <a:noFill/>
-          <a:effectLst/>
-        </p:spPr>
-        <p:txBody>
-          <a:bodyPr wrap="square" lIns="27432" rIns="27432" tIns="18288" bIns="18288" anchor="ctr">
-            <a:spAutoFit/>
-          </a:bodyPr>
-          <a:lstStyle/>
-          <a:p>
-            <a:pPr algn="l">
-              <a:spcAft>
-                <a:spcPts val="0"/>
-              </a:spcAft>
-            </a:pPr>
-            <a:r>
-              <a:rPr sz="1150" b="0" i="0">
-                <a:solidFill>
-                  <a:srgbClr val="B4C7D2"/>
-                </a:solidFill>
-                <a:latin typeface="Arial"/>
-              </a:rPr>
-              <a:t>• y = Ṙ²; y′ = dy/dR</a:t>
-            </a:r>
-          </a:p>
-        </p:txBody>
-      </p:sp>
-      <p:sp>
-        <p:nvSpPr>
-          <p:cNvPr id="19" name="C3-E08 text 17" descr="sci-ppt:o017"/>
-          <p:cNvSpPr txBox="1"/>
-          <p:nvPr/>
-        </p:nvSpPr>
-        <p:spPr>
-          <a:xfrm>
-            <a:off x="320040" y="4329684"/>
-            <a:ext cx="5715000" cy="246888"/>
-          </a:xfrm>
-          <a:prstGeom prst="rect">
-            <a:avLst/>
-          </a:prstGeom>
-          <a:noFill/>
-          <a:effectLst/>
-        </p:spPr>
-        <p:txBody>
-          <a:bodyPr wrap="square" lIns="27432" rIns="27432" tIns="18288" bIns="18288" anchor="ctr">
-            <a:spAutoFit/>
-          </a:bodyPr>
-          <a:lstStyle/>
-          <a:p>
-            <a:pPr algn="l">
-              <a:spcAft>
-                <a:spcPts val="0"/>
-              </a:spcAft>
-            </a:pPr>
-            <a:r>
-              <a:rPr sz="1150" b="0" i="0">
-                <a:solidFill>
-                  <a:srgbClr val="B4C7D2"/>
-                </a:solidFill>
-                <a:latin typeface="Arial"/>
-              </a:rPr>
-              <a:t>• S, ρ, Δp_c</a:t>
-            </a:r>
-          </a:p>
-        </p:txBody>
-      </p:sp>
-      <p:sp>
-        <p:nvSpPr>
-          <p:cNvPr id="20" name="C3-E08 text 18" descr="sci-ppt:o018"/>
-          <p:cNvSpPr txBox="1"/>
-          <p:nvPr/>
-        </p:nvSpPr>
-        <p:spPr>
-          <a:xfrm>
-            <a:off x="6217920" y="4329684"/>
-            <a:ext cx="5715000" cy="246888"/>
-          </a:xfrm>
-          <a:prstGeom prst="rect">
-            <a:avLst/>
-          </a:prstGeom>
-          <a:noFill/>
-          <a:effectLst/>
-        </p:spPr>
-        <p:txBody>
-          <a:bodyPr wrap="square" lIns="27432" rIns="27432" tIns="18288" bIns="18288" anchor="ctr">
-            <a:spAutoFit/>
-          </a:bodyPr>
-          <a:lstStyle/>
-          <a:p>
-            <a:pPr algn="l">
-              <a:spcAft>
-                <a:spcPts val="0"/>
-              </a:spcAft>
-            </a:pPr>
-            <a:r>
-              <a:rPr sz="1150" b="0" i="0">
-                <a:solidFill>
-                  <a:srgbClr val="B4C7D2"/>
-                </a:solidFill>
-                <a:latin typeface="Arial"/>
-              </a:rPr>
-              <a:t>• R³(1 + SR) liquid-inertia factor</a:t>
-            </a:r>
-          </a:p>
-        </p:txBody>
-      </p:sp>
-      <p:sp>
-        <p:nvSpPr>
-          <p:cNvPr id="21" name="C3-E08 text 19" descr="sci-ppt:o019"/>
-          <p:cNvSpPr txBox="1"/>
-          <p:nvPr/>
-        </p:nvSpPr>
-        <p:spPr>
-          <a:xfrm>
-            <a:off x="320040" y="4562856"/>
-            <a:ext cx="5715000" cy="246888"/>
-          </a:xfrm>
-          <a:prstGeom prst="rect">
-            <a:avLst/>
-          </a:prstGeom>
-          <a:noFill/>
-          <a:effectLst/>
-        </p:spPr>
-        <p:txBody>
-          <a:bodyPr wrap="square" lIns="27432" rIns="27432" tIns="18288" bIns="18288" anchor="ctr">
-            <a:spAutoFit/>
-          </a:bodyPr>
-          <a:lstStyle/>
-          <a:p>
-            <a:pPr algn="l">
-              <a:spcAft>
-                <a:spcPts val="0"/>
-              </a:spcAft>
-            </a:pPr>
-            <a:r>
-              <a:rPr sz="1150" b="0" i="0">
-                <a:solidFill>
-                  <a:srgbClr val="B4C7D2"/>
-                </a:solidFill>
-                <a:latin typeface="Arial"/>
-              </a:rPr>
-              <a:t>• ℓ_*: dimensional reference; ln, d/dR</a:t>
-            </a:r>
-          </a:p>
-        </p:txBody>
-      </p:sp>
-      <p:sp>
-        <p:nvSpPr>
-          <p:cNvPr id="22" name="C3-E08 text 20" descr="sci-ppt:o020"/>
-          <p:cNvSpPr txBox="1"/>
-          <p:nvPr/>
-        </p:nvSpPr>
-        <p:spPr>
-          <a:xfrm>
-            <a:off x="320040" y="5596128"/>
-            <a:ext cx="11430000" cy="292608"/>
-          </a:xfrm>
-          <a:prstGeom prst="rect">
-            <a:avLst/>
-          </a:prstGeom>
-          <a:noFill/>
-          <a:effectLst/>
-        </p:spPr>
-        <p:txBody>
-          <a:bodyPr wrap="square" lIns="27432" rIns="27432" tIns="18288" bIns="18288" anchor="ctr">
-            <a:spAutoFit/>
-          </a:bodyPr>
-          <a:lstStyle/>
-          <a:p>
-            <a:pPr algn="l">
-              <a:spcAft>
-                <a:spcPts val="0"/>
-              </a:spcAft>
-            </a:pPr>
-            <a:r>
-              <a:rPr sz="1150" b="0" i="0">
-                <a:solidFill>
-                  <a:srgbClr val="8EDBD4"/>
-                </a:solidFill>
-                <a:latin typeface="Arial"/>
-              </a:rPr>
-              <a:t>Restrict cancellation to Ṙ ≠ 0</a:t>
-            </a:r>
-          </a:p>
-        </p:txBody>
-      </p:sp>
-      <p:sp>
-        <p:nvSpPr>
-          <p:cNvPr id="23" name="C3-E08 text 21" descr="sci-ppt:o021"/>
-          <p:cNvSpPr txBox="1"/>
-          <p:nvPr/>
-        </p:nvSpPr>
-        <p:spPr>
-          <a:xfrm>
-            <a:off x="320040" y="5870448"/>
-            <a:ext cx="11430000" cy="292608"/>
-          </a:xfrm>
-          <a:prstGeom prst="rect">
-            <a:avLst/>
-          </a:prstGeom>
-          <a:noFill/>
-          <a:effectLst/>
-        </p:spPr>
-        <p:txBody>
-          <a:bodyPr wrap="square" lIns="27432" rIns="27432" tIns="18288" bIns="18288" anchor="ctr">
-            <a:spAutoFit/>
-          </a:bodyPr>
-          <a:lstStyle/>
-          <a:p>
-            <a:pPr algn="l">
-              <a:spcAft>
-                <a:spcPts val="0"/>
-              </a:spcAft>
-            </a:pPr>
-            <a:r>
-              <a:rPr sz="1150" b="0" i="0">
-                <a:solidFill>
-                  <a:srgbClr val="8EDBD4"/>
-                </a:solidFill>
-                <a:latin typeface="Arial"/>
-              </a:rPr>
-              <a:t>Continuous initial limit restores Ṙ = 0</a:t>
-            </a:r>
-          </a:p>
-        </p:txBody>
-      </p:sp>
-      <p:sp>
-        <p:nvSpPr>
-          <p:cNvPr id="24" name="C3-E08 text 22" descr="sci-ppt:o022"/>
-          <p:cNvSpPr txBox="1"/>
-          <p:nvPr/>
-        </p:nvSpPr>
-        <p:spPr>
-          <a:xfrm>
-            <a:off x="320040" y="6473952"/>
-            <a:ext cx="11430000" cy="256032"/>
-          </a:xfrm>
-          <a:prstGeom prst="rect">
-            <a:avLst/>
-          </a:prstGeom>
-          <a:noFill/>
-          <a:effectLst/>
-        </p:spPr>
-        <p:txBody>
-          <a:bodyPr wrap="square" lIns="27432" rIns="27432" tIns="18288" bIns="18288" anchor="ctr">
+          <a:bodyPr wrap="none" lIns="18288" rIns="18288" tIns="18288" bIns="18288" anchor="t">
             <a:spAutoFit/>
           </a:bodyPr>
           <a:lstStyle/>
@@ -3911,7 +5864,7 @@
                 </a:solidFill>
                 <a:latin typeface="Arial"/>
               </a:rPr>
-              <a:t>Model schematic; geometry is not to scale.</a:t>
+              <a:t>Integrating factor of Eq. C3-E08.</a:t>
             </a:r>
           </a:p>
         </p:txBody>
